--- a/docs/descargas/presentacion-ai-clauses.pptx
+++ b/docs/descargas/presentacion-ai-clauses.pptx
@@ -18,9 +18,10 @@
     <p:sldId id="266" r:id="rId12"/>
     <p:sldId id="267" r:id="rId13"/>
     <p:sldId id="268" r:id="rId14"/>
+    <p:sldId id="269" r:id="rId15"/>
   </p:sldIdLst>
   <p:notesMasterIdLst>
-    <p:notesMasterId r:id="rId15"/>
+    <p:notesMasterId r:id="rId16"/>
   </p:notesMasterIdLst>
   <p:sldSz cx="12192000" cy="6858000"/>
   <p:notesSz cx="6858000" cy="12192000"/>
@@ -890,6 +891,94 @@
             <a:fld id="{F7021451-1387-4CA6-816F-3879F97B5CBC}" type="slidenum">
               <a:rPr lang="en-US"/>
               <a:t>13</a:t>
+            </a:fld>
+            <a:endParaRPr lang="en-US"/>
+          </a:p>
+        </p:txBody>
+      </p:sp>
+    </p:spTree>
+    <p:extLst>
+      <p:ext uri="{BB962C8B-B14F-4D97-AF65-F5344CB8AC3E}">
+        <p14:creationId xmlns:p14="http://schemas.microsoft.com/office/powerpoint/2010/main" val="1024086991"/>
+      </p:ext>
+    </p:extLst>
+  </p:cSld>
+  <p:clrMapOvr>
+    <a:masterClrMapping/>
+  </p:clrMapOvr>
+</p:notes>
+</file>
+
+<file path=ppt/notesSlides/notesSlide14.xml><?xml version="1.0" encoding="utf-8"?>
+<p:notes xmlns:a="http://schemas.openxmlformats.org/drawingml/2006/main" xmlns:r="http://schemas.openxmlformats.org/officeDocument/2006/relationships" xmlns:p="http://schemas.openxmlformats.org/presentationml/2006/main">
+  <p:cSld>
+    <p:spTree>
+      <p:nvGrpSpPr>
+        <p:cNvPr id="1" name=""/>
+        <p:cNvGrpSpPr/>
+        <p:nvPr/>
+      </p:nvGrpSpPr>
+      <p:grpSpPr>
+        <a:xfrm>
+          <a:off x="0" y="0"/>
+          <a:ext cx="0" cy="0"/>
+          <a:chOff x="0" y="0"/>
+          <a:chExt cx="0" cy="0"/>
+        </a:xfrm>
+      </p:grpSpPr>
+      <p:sp>
+        <p:nvSpPr>
+          <p:cNvPr id="2" name="Slide Image Placeholder 1"/>
+          <p:cNvSpPr>
+            <a:spLocks noGrp="1" noRot="1" noChangeAspect="1"/>
+          </p:cNvSpPr>
+          <p:nvPr>
+            <p:ph type="sldImg"/>
+          </p:nvPr>
+        </p:nvSpPr>
+        <p:spPr/>
+      </p:sp>
+      <p:sp>
+        <p:nvSpPr>
+          <p:cNvPr id="3" name="Notes Placeholder 2"/>
+          <p:cNvSpPr>
+            <a:spLocks noGrp="1"/>
+          </p:cNvSpPr>
+          <p:nvPr>
+            <p:ph type="body" idx="1"/>
+          </p:nvPr>
+        </p:nvSpPr>
+        <p:spPr/>
+        <p:txBody>
+          <a:bodyPr/>
+          <a:lstStyle/>
+          <a:p>
+            <a:r>
+              <a:rPr lang="en-US" dirty="0"/>
+              <a:t/>
+            </a:r>
+            <a:endParaRPr lang="en-US" dirty="0"/>
+          </a:p>
+        </p:txBody>
+      </p:sp>
+      <p:sp>
+        <p:nvSpPr>
+          <p:cNvPr id="4" name="Slide Number Placeholder 3"/>
+          <p:cNvSpPr>
+            <a:spLocks noGrp="1"/>
+          </p:cNvSpPr>
+          <p:nvPr>
+            <p:ph type="sldNum" sz="quarter" idx="10"/>
+          </p:nvPr>
+        </p:nvSpPr>
+        <p:spPr/>
+        <p:txBody>
+          <a:bodyPr/>
+          <a:lstStyle/>
+          <a:p>
+            <a:fld id="{F7021451-1387-4CA6-816F-3879F97B5CBC}" type="slidenum">
+              <a:rPr lang="en-US"/>
+              <a:t>14</a:t>
             </a:fld>
             <a:endParaRPr lang="en-US"/>
           </a:p>
@@ -2139,7 +2228,7 @@
                 <a:ea typeface="Calibri" pitchFamily="34" charset="-122"/>
                 <a:cs typeface="Calibri" pitchFamily="34" charset="-120"/>
               </a:rPr>
-              <a:t>Miguel Ángel Domínguez Castellano</a:t>
+              <a:t>Delfina Lafuente Veira  ·  Dr. José Antonio Ondiviela García  ·  Miguel Ángel Domínguez Castellano</a:t>
             </a:r>
             <a:endParaRPr lang="en-US" sz="1500" dirty="0"/>
           </a:p>
@@ -3154,14 +3243,53 @@
       </p:sp>
       <p:sp>
         <p:nvSpPr>
-          <p:cNvPr id="3" name="Shape 1"/>
-          <p:cNvSpPr/>
-          <p:nvPr/>
-        </p:nvSpPr>
-        <p:spPr>
-          <a:xfrm>
-            <a:off x="822960" y="1645920"/>
-            <a:ext cx="82296" cy="1554480"/>
+          <p:cNvPr id="3" name="Text 1"/>
+          <p:cNvSpPr/>
+          <p:nvPr/>
+        </p:nvSpPr>
+        <p:spPr>
+          <a:xfrm>
+            <a:off x="822960" y="1371600"/>
+            <a:ext cx="10515600" cy="548640"/>
+          </a:xfrm>
+          <a:prstGeom prst="rect">
+            <a:avLst/>
+          </a:prstGeom>
+          <a:noFill/>
+          <a:ln/>
+        </p:spPr>
+        <p:txBody>
+          <a:bodyPr wrap="square" rtlCol="0" anchor="ctr"/>
+          <a:lstStyle/>
+          <a:p>
+            <a:pPr indent="0" marL="0">
+              <a:buNone/>
+            </a:pPr>
+            <a:r>
+              <a:rPr lang="en-US" sz="1600" dirty="0">
+                <a:solidFill>
+                  <a:srgbClr val="22201D"/>
+                </a:solidFill>
+                <a:latin typeface="Calibri" pitchFamily="34" charset="0"/>
+                <a:ea typeface="Calibri" pitchFamily="34" charset="-122"/>
+                <a:cs typeface="Calibri" pitchFamily="34" charset="-120"/>
+              </a:rPr>
+              <a:t>Un trabajo conjunto de varios meses entre tres personas, cada una desde su oficio, con el Ayuntamiento de Pozuelo de Alarcón como banco de pruebas real.</a:t>
+            </a:r>
+            <a:endParaRPr lang="en-US" sz="1600" dirty="0"/>
+          </a:p>
+        </p:txBody>
+      </p:sp>
+      <p:sp>
+        <p:nvSpPr>
+          <p:cNvPr id="4" name="Shape 2"/>
+          <p:cNvSpPr/>
+          <p:nvPr/>
+        </p:nvSpPr>
+        <p:spPr>
+          <a:xfrm>
+            <a:off x="822960" y="2057400"/>
+            <a:ext cx="82296" cy="1170432"/>
           </a:xfrm>
           <a:prstGeom prst="rect">
             <a:avLst/>
@@ -3174,30 +3302,30 @@
       </p:sp>
       <p:sp>
         <p:nvSpPr>
-          <p:cNvPr id="4" name="Text 2"/>
-          <p:cNvSpPr/>
-          <p:nvPr/>
-        </p:nvSpPr>
-        <p:spPr>
-          <a:xfrm>
-            <a:off x="1188720" y="1645920"/>
-            <a:ext cx="10058400" cy="457200"/>
-          </a:xfrm>
-          <a:prstGeom prst="rect">
-            <a:avLst/>
-          </a:prstGeom>
-          <a:noFill/>
-          <a:ln/>
-        </p:spPr>
-        <p:txBody>
-          <a:bodyPr wrap="square" rtlCol="0" anchor="ctr"/>
-          <a:lstStyle/>
-          <a:p>
-            <a:pPr indent="0" marL="0">
-              <a:buNone/>
-            </a:pPr>
-            <a:r>
-              <a:rPr lang="en-US" sz="2200" b="1" dirty="0">
+          <p:cNvPr id="5" name="Text 3"/>
+          <p:cNvSpPr/>
+          <p:nvPr/>
+        </p:nvSpPr>
+        <p:spPr>
+          <a:xfrm>
+            <a:off x="1188720" y="2057400"/>
+            <a:ext cx="10058400" cy="365760"/>
+          </a:xfrm>
+          <a:prstGeom prst="rect">
+            <a:avLst/>
+          </a:prstGeom>
+          <a:noFill/>
+          <a:ln/>
+        </p:spPr>
+        <p:txBody>
+          <a:bodyPr wrap="square" rtlCol="0" anchor="ctr"/>
+          <a:lstStyle/>
+          <a:p>
+            <a:pPr indent="0" marL="0">
+              <a:buNone/>
+            </a:pPr>
+            <a:r>
+              <a:rPr lang="en-US" sz="1800" b="1" dirty="0">
                 <a:solidFill>
                   <a:srgbClr val="1F3864"/>
                 </a:solidFill>
@@ -3207,53 +3335,75 @@
               </a:rPr>
               <a:t>Delfina Lafuente Veira</a:t>
             </a:r>
-            <a:endParaRPr lang="en-US" sz="2200" dirty="0"/>
-          </a:p>
-        </p:txBody>
-      </p:sp>
-      <p:sp>
-        <p:nvSpPr>
-          <p:cNvPr id="5" name="Text 3"/>
-          <p:cNvSpPr/>
-          <p:nvPr/>
-        </p:nvSpPr>
-        <p:spPr>
-          <a:xfrm>
-            <a:off x="1188720" y="2148840"/>
-            <a:ext cx="10058400" cy="685800"/>
-          </a:xfrm>
-          <a:prstGeom prst="rect">
-            <a:avLst/>
-          </a:prstGeom>
-          <a:noFill/>
-          <a:ln/>
-        </p:spPr>
-        <p:txBody>
-          <a:bodyPr wrap="square" rtlCol="0" anchor="ctr"/>
-          <a:lstStyle/>
-          <a:p>
-            <a:pPr indent="0" marL="0">
-              <a:buNone/>
-            </a:pPr>
-            <a:r>
-              <a:rPr lang="en-US" sz="1550" dirty="0">
-                <a:solidFill>
-                  <a:srgbClr val="22201D"/>
+            <a:endParaRPr lang="en-US" sz="1800" dirty="0"/>
+          </a:p>
+        </p:txBody>
+      </p:sp>
+      <p:sp>
+        <p:nvSpPr>
+          <p:cNvPr id="6" name="Text 4"/>
+          <p:cNvSpPr/>
+          <p:nvPr/>
+        </p:nvSpPr>
+        <p:spPr>
+          <a:xfrm>
+            <a:off x="1188720" y="2423160"/>
+            <a:ext cx="10058400" cy="292608"/>
+          </a:xfrm>
+          <a:prstGeom prst="rect">
+            <a:avLst/>
+          </a:prstGeom>
+          <a:noFill/>
+          <a:ln/>
+        </p:spPr>
+        <p:txBody>
+          <a:bodyPr wrap="square" rtlCol="0" anchor="ctr"/>
+          <a:lstStyle/>
+          <a:p>
+            <a:pPr indent="0" marL="0">
+              <a:buNone/>
+            </a:pPr>
+            <a:r>
+              <a:rPr lang="en-US" sz="1300" dirty="0">
+                <a:solidFill>
+                  <a:srgbClr val="6E6A63"/>
                 </a:solidFill>
                 <a:latin typeface="Calibri" pitchFamily="34" charset="0"/>
                 <a:ea typeface="Calibri" pitchFamily="34" charset="-122"/>
                 <a:cs typeface="Calibri" pitchFamily="34" charset="-120"/>
               </a:rPr>
-              <a:t>Concejal de Administración Digital, Calidad e Innovación</a:t>
-            </a:r>
-            <a:endParaRPr lang="en-US" sz="1550" dirty="0"/>
-          </a:p>
-          <a:p>
-            <a:pPr indent="0" marL="0">
-              <a:buNone/>
-            </a:pPr>
-            <a:r>
-              <a:rPr lang="en-US" sz="1550" dirty="0">
+              <a:t>Concejal de Administración Digital, Calidad e Innovación · Ayuntamiento de Pozuelo de Alarcón</a:t>
+            </a:r>
+            <a:endParaRPr lang="en-US" sz="1300" dirty="0"/>
+          </a:p>
+        </p:txBody>
+      </p:sp>
+      <p:sp>
+        <p:nvSpPr>
+          <p:cNvPr id="7" name="Text 5"/>
+          <p:cNvSpPr/>
+          <p:nvPr/>
+        </p:nvSpPr>
+        <p:spPr>
+          <a:xfrm>
+            <a:off x="1188720" y="2734056"/>
+            <a:ext cx="10058400" cy="502920"/>
+          </a:xfrm>
+          <a:prstGeom prst="rect">
+            <a:avLst/>
+          </a:prstGeom>
+          <a:noFill/>
+          <a:ln/>
+        </p:spPr>
+        <p:txBody>
+          <a:bodyPr wrap="square" rtlCol="0" anchor="ctr"/>
+          <a:lstStyle/>
+          <a:p>
+            <a:pPr indent="0" marL="0">
+              <a:buNone/>
+            </a:pPr>
+            <a:r>
+              <a:rPr lang="en-US" sz="1350" dirty="0">
                 <a:solidFill>
                   <a:srgbClr val="22201D"/>
                 </a:solidFill>
@@ -3261,21 +3411,41 @@
                 <a:ea typeface="Calibri" pitchFamily="34" charset="-122"/>
                 <a:cs typeface="Calibri" pitchFamily="34" charset="-120"/>
               </a:rPr>
-              <a:t>Ayuntamiento de Pozuelo de Alarcón</a:t>
-            </a:r>
-            <a:endParaRPr lang="en-US" sz="1550" dirty="0"/>
-          </a:p>
-        </p:txBody>
-      </p:sp>
-      <p:sp>
-        <p:nvSpPr>
-          <p:cNvPr id="6" name="Text 4"/>
-          <p:cNvSpPr/>
-          <p:nvPr/>
-        </p:nvSpPr>
-        <p:spPr>
-          <a:xfrm>
-            <a:off x="1188720" y="2788920"/>
+              <a:t>De ella nace el proyecto y suya es la primera redacción. Y suyo es el mérito menos visible: llevarlo a los servicios de contratación y jurídicos de su propio ayuntamiento y traer sus objeciones de vuelta enteras.</a:t>
+            </a:r>
+            <a:endParaRPr lang="en-US" sz="1350" dirty="0"/>
+          </a:p>
+        </p:txBody>
+      </p:sp>
+      <p:sp>
+        <p:nvSpPr>
+          <p:cNvPr id="8" name="Shape 6"/>
+          <p:cNvSpPr/>
+          <p:nvPr/>
+        </p:nvSpPr>
+        <p:spPr>
+          <a:xfrm>
+            <a:off x="822960" y="3429000"/>
+            <a:ext cx="82296" cy="1170432"/>
+          </a:xfrm>
+          <a:prstGeom prst="rect">
+            <a:avLst/>
+          </a:prstGeom>
+          <a:solidFill>
+            <a:srgbClr val="1F3864"/>
+          </a:solidFill>
+          <a:ln/>
+        </p:spPr>
+      </p:sp>
+      <p:sp>
+        <p:nvSpPr>
+          <p:cNvPr id="9" name="Text 7"/>
+          <p:cNvSpPr/>
+          <p:nvPr/>
+        </p:nvSpPr>
+        <p:spPr>
+          <a:xfrm>
+            <a:off x="1188720" y="3429000"/>
             <a:ext cx="10058400" cy="365760"/>
           </a:xfrm>
           <a:prstGeom prst="rect">
@@ -3292,7 +3462,46 @@
               <a:buNone/>
             </a:pPr>
             <a:r>
-              <a:rPr lang="en-US" sz="1400" i="1" dirty="0">
+              <a:rPr lang="en-US" sz="1800" b="1" dirty="0">
+                <a:solidFill>
+                  <a:srgbClr val="1F3864"/>
+                </a:solidFill>
+                <a:latin typeface="Georgia" pitchFamily="34" charset="0"/>
+                <a:ea typeface="Georgia" pitchFamily="34" charset="-122"/>
+                <a:cs typeface="Georgia" pitchFamily="34" charset="-120"/>
+              </a:rPr>
+              <a:t>Dr. José Antonio Ondiviela García</a:t>
+            </a:r>
+            <a:endParaRPr lang="en-US" sz="1800" dirty="0"/>
+          </a:p>
+        </p:txBody>
+      </p:sp>
+      <p:sp>
+        <p:nvSpPr>
+          <p:cNvPr id="10" name="Text 8"/>
+          <p:cNvSpPr/>
+          <p:nvPr/>
+        </p:nvSpPr>
+        <p:spPr>
+          <a:xfrm>
+            <a:off x="1188720" y="3794760"/>
+            <a:ext cx="10058400" cy="292608"/>
+          </a:xfrm>
+          <a:prstGeom prst="rect">
+            <a:avLst/>
+          </a:prstGeom>
+          <a:noFill/>
+          <a:ln/>
+        </p:spPr>
+        <p:txBody>
+          <a:bodyPr wrap="square" rtlCol="0" anchor="ctr"/>
+          <a:lstStyle/>
+          <a:p>
+            <a:pPr indent="0" marL="0">
+              <a:buNone/>
+            </a:pPr>
+            <a:r>
+              <a:rPr lang="en-US" sz="1300" dirty="0">
                 <a:solidFill>
                   <a:srgbClr val="6E6A63"/>
                 </a:solidFill>
@@ -3300,22 +3509,61 @@
                 <a:ea typeface="Calibri" pitchFamily="34" charset="-122"/>
                 <a:cs typeface="Calibri" pitchFamily="34" charset="-120"/>
               </a:rPr>
-              <a:t>Impulsora del proyecto y autora del clausulado original</a:t>
-            </a:r>
-            <a:endParaRPr lang="en-US" sz="1400" dirty="0"/>
-          </a:p>
-        </p:txBody>
-      </p:sp>
-      <p:sp>
-        <p:nvSpPr>
-          <p:cNvPr id="7" name="Shape 5"/>
-          <p:cNvSpPr/>
-          <p:nvPr/>
-        </p:nvSpPr>
-        <p:spPr>
-          <a:xfrm>
-            <a:off x="822960" y="3474720"/>
-            <a:ext cx="82296" cy="1554480"/>
+              <a:t>Profesor e investigador de la Escuela Politécnica Superior · Universidad Francisco de Vitoria</a:t>
+            </a:r>
+            <a:endParaRPr lang="en-US" sz="1300" dirty="0"/>
+          </a:p>
+        </p:txBody>
+      </p:sp>
+      <p:sp>
+        <p:nvSpPr>
+          <p:cNvPr id="11" name="Text 9"/>
+          <p:cNvSpPr/>
+          <p:nvPr/>
+        </p:nvSpPr>
+        <p:spPr>
+          <a:xfrm>
+            <a:off x="1188720" y="4105656"/>
+            <a:ext cx="10058400" cy="502920"/>
+          </a:xfrm>
+          <a:prstGeom prst="rect">
+            <a:avLst/>
+          </a:prstGeom>
+          <a:noFill/>
+          <a:ln/>
+        </p:spPr>
+        <p:txBody>
+          <a:bodyPr wrap="square" rtlCol="0" anchor="ctr"/>
+          <a:lstStyle/>
+          <a:p>
+            <a:pPr indent="0" marL="0">
+              <a:buNone/>
+            </a:pPr>
+            <a:r>
+              <a:rPr lang="en-US" sz="1350" dirty="0">
+                <a:solidFill>
+                  <a:srgbClr val="22201D"/>
+                </a:solidFill>
+                <a:latin typeface="Calibri" pitchFamily="34" charset="0"/>
+                <a:ea typeface="Calibri" pitchFamily="34" charset="-122"/>
+                <a:cs typeface="Calibri" pitchFamily="34" charset="-120"/>
+              </a:rPr>
+              <a:t>La mirada del mercado: qué se le puede pedir de verdad a un fabricante de software y qué hará que no se presente. Suya es la idea que resuelve el problema de fondo.</a:t>
+            </a:r>
+            <a:endParaRPr lang="en-US" sz="1350" dirty="0"/>
+          </a:p>
+        </p:txBody>
+      </p:sp>
+      <p:sp>
+        <p:nvSpPr>
+          <p:cNvPr id="12" name="Shape 10"/>
+          <p:cNvSpPr/>
+          <p:nvPr/>
+        </p:nvSpPr>
+        <p:spPr>
+          <a:xfrm>
+            <a:off x="822960" y="4800600"/>
+            <a:ext cx="82296" cy="1170432"/>
           </a:xfrm>
           <a:prstGeom prst="rect">
             <a:avLst/>
@@ -3328,30 +3576,30 @@
       </p:sp>
       <p:sp>
         <p:nvSpPr>
-          <p:cNvPr id="8" name="Text 6"/>
-          <p:cNvSpPr/>
-          <p:nvPr/>
-        </p:nvSpPr>
-        <p:spPr>
-          <a:xfrm>
-            <a:off x="1188720" y="3474720"/>
-            <a:ext cx="10058400" cy="457200"/>
-          </a:xfrm>
-          <a:prstGeom prst="rect">
-            <a:avLst/>
-          </a:prstGeom>
-          <a:noFill/>
-          <a:ln/>
-        </p:spPr>
-        <p:txBody>
-          <a:bodyPr wrap="square" rtlCol="0" anchor="ctr"/>
-          <a:lstStyle/>
-          <a:p>
-            <a:pPr indent="0" marL="0">
-              <a:buNone/>
-            </a:pPr>
-            <a:r>
-              <a:rPr lang="en-US" sz="2200" b="1" dirty="0">
+          <p:cNvPr id="13" name="Text 11"/>
+          <p:cNvSpPr/>
+          <p:nvPr/>
+        </p:nvSpPr>
+        <p:spPr>
+          <a:xfrm>
+            <a:off x="1188720" y="4800600"/>
+            <a:ext cx="10058400" cy="365760"/>
+          </a:xfrm>
+          <a:prstGeom prst="rect">
+            <a:avLst/>
+          </a:prstGeom>
+          <a:noFill/>
+          <a:ln/>
+        </p:spPr>
+        <p:txBody>
+          <a:bodyPr wrap="square" rtlCol="0" anchor="ctr"/>
+          <a:lstStyle/>
+          <a:p>
+            <a:pPr indent="0" marL="0">
+              <a:buNone/>
+            </a:pPr>
+            <a:r>
+              <a:rPr lang="en-US" sz="1800" b="1" dirty="0">
                 <a:solidFill>
                   <a:srgbClr val="1F3864"/>
                 </a:solidFill>
@@ -3359,55 +3607,77 @@
                 <a:ea typeface="Georgia" pitchFamily="34" charset="-122"/>
                 <a:cs typeface="Georgia" pitchFamily="34" charset="-120"/>
               </a:rPr>
-              <a:t>Dr. José Antonio Ondiviela García</a:t>
-            </a:r>
-            <a:endParaRPr lang="en-US" sz="2200" dirty="0"/>
-          </a:p>
-        </p:txBody>
-      </p:sp>
-      <p:sp>
-        <p:nvSpPr>
-          <p:cNvPr id="9" name="Text 7"/>
-          <p:cNvSpPr/>
-          <p:nvPr/>
-        </p:nvSpPr>
-        <p:spPr>
-          <a:xfrm>
-            <a:off x="1188720" y="3977640"/>
-            <a:ext cx="10058400" cy="685800"/>
-          </a:xfrm>
-          <a:prstGeom prst="rect">
-            <a:avLst/>
-          </a:prstGeom>
-          <a:noFill/>
-          <a:ln/>
-        </p:spPr>
-        <p:txBody>
-          <a:bodyPr wrap="square" rtlCol="0" anchor="ctr"/>
-          <a:lstStyle/>
-          <a:p>
-            <a:pPr indent="0" marL="0">
-              <a:buNone/>
-            </a:pPr>
-            <a:r>
-              <a:rPr lang="en-US" sz="1550" dirty="0">
-                <a:solidFill>
-                  <a:srgbClr val="22201D"/>
+              <a:t>Miguel Ángel Domínguez Castellano</a:t>
+            </a:r>
+            <a:endParaRPr lang="en-US" sz="1800" dirty="0"/>
+          </a:p>
+        </p:txBody>
+      </p:sp>
+      <p:sp>
+        <p:nvSpPr>
+          <p:cNvPr id="14" name="Text 12"/>
+          <p:cNvSpPr/>
+          <p:nvPr/>
+        </p:nvSpPr>
+        <p:spPr>
+          <a:xfrm>
+            <a:off x="1188720" y="5166360"/>
+            <a:ext cx="10058400" cy="292608"/>
+          </a:xfrm>
+          <a:prstGeom prst="rect">
+            <a:avLst/>
+          </a:prstGeom>
+          <a:noFill/>
+          <a:ln/>
+        </p:spPr>
+        <p:txBody>
+          <a:bodyPr wrap="square" rtlCol="0" anchor="ctr"/>
+          <a:lstStyle/>
+          <a:p>
+            <a:pPr indent="0" marL="0">
+              <a:buNone/>
+            </a:pPr>
+            <a:r>
+              <a:rPr lang="en-US" sz="1300" dirty="0">
+                <a:solidFill>
+                  <a:srgbClr val="6E6A63"/>
                 </a:solidFill>
                 <a:latin typeface="Calibri" pitchFamily="34" charset="0"/>
                 <a:ea typeface="Calibri" pitchFamily="34" charset="-122"/>
                 <a:cs typeface="Calibri" pitchFamily="34" charset="-120"/>
               </a:rPr>
-              <a:t>Profesor de la Escuela Politécnica Superior e investigador</a:t>
-            </a:r>
-            <a:endParaRPr lang="en-US" sz="1550" dirty="0"/>
-          </a:p>
-          <a:p>
-            <a:pPr indent="0" marL="0">
-              <a:buNone/>
-            </a:pPr>
-            <a:r>
-              <a:rPr lang="en-US" sz="1550" dirty="0">
+              <a:t>CEO de Add4u · Presidente de Alastria · Presidente del Clúster de Blockchain de la Comunidad de Madrid</a:t>
+            </a:r>
+            <a:endParaRPr lang="en-US" sz="1300" dirty="0"/>
+          </a:p>
+        </p:txBody>
+      </p:sp>
+      <p:sp>
+        <p:nvSpPr>
+          <p:cNvPr id="15" name="Text 13"/>
+          <p:cNvSpPr/>
+          <p:nvPr/>
+        </p:nvSpPr>
+        <p:spPr>
+          <a:xfrm>
+            <a:off x="1188720" y="5477256"/>
+            <a:ext cx="10058400" cy="502920"/>
+          </a:xfrm>
+          <a:prstGeom prst="rect">
+            <a:avLst/>
+          </a:prstGeom>
+          <a:noFill/>
+          <a:ln/>
+        </p:spPr>
+        <p:txBody>
+          <a:bodyPr wrap="square" rtlCol="0" anchor="ctr"/>
+          <a:lstStyle/>
+          <a:p>
+            <a:pPr indent="0" marL="0">
+              <a:buNone/>
+            </a:pPr>
+            <a:r>
+              <a:rPr lang="en-US" sz="1350" dirty="0">
                 <a:solidFill>
                   <a:srgbClr val="22201D"/>
                 </a:solidFill>
@@ -3415,38 +3685,38 @@
                 <a:ea typeface="Calibri" pitchFamily="34" charset="-122"/>
                 <a:cs typeface="Calibri" pitchFamily="34" charset="-120"/>
               </a:rPr>
-              <a:t>Universidad Francisco de Vitoria</a:t>
-            </a:r>
-            <a:endParaRPr lang="en-US" sz="1550" dirty="0"/>
-          </a:p>
-        </p:txBody>
-      </p:sp>
-      <p:sp>
-        <p:nvSpPr>
-          <p:cNvPr id="10" name="Text 8"/>
-          <p:cNvSpPr/>
-          <p:nvPr/>
-        </p:nvSpPr>
-        <p:spPr>
-          <a:xfrm>
-            <a:off x="1188720" y="4617720"/>
-            <a:ext cx="10058400" cy="365760"/>
-          </a:xfrm>
-          <a:prstGeom prst="rect">
-            <a:avLst/>
-          </a:prstGeom>
-          <a:noFill/>
-          <a:ln/>
-        </p:spPr>
-        <p:txBody>
-          <a:bodyPr wrap="square" rtlCol="0" anchor="ctr"/>
-          <a:lstStyle/>
-          <a:p>
-            <a:pPr indent="0" marL="0">
-              <a:buNone/>
-            </a:pPr>
-            <a:r>
-              <a:rPr lang="en-US" sz="1400" i="1" dirty="0">
+              <a:t>La perspectiva de quien conoce las dos orillas: la de quien redacta pliegos y la de quien se presenta a ellos. Asume la responsabilidad editorial de la publicación.</a:t>
+            </a:r>
+            <a:endParaRPr lang="en-US" sz="1350" dirty="0"/>
+          </a:p>
+        </p:txBody>
+      </p:sp>
+      <p:sp>
+        <p:nvSpPr>
+          <p:cNvPr id="16" name="Text 14"/>
+          <p:cNvSpPr/>
+          <p:nvPr/>
+        </p:nvSpPr>
+        <p:spPr>
+          <a:xfrm>
+            <a:off x="822960" y="5806440"/>
+            <a:ext cx="10515600" cy="731520"/>
+          </a:xfrm>
+          <a:prstGeom prst="rect">
+            <a:avLst/>
+          </a:prstGeom>
+          <a:noFill/>
+          <a:ln/>
+        </p:spPr>
+        <p:txBody>
+          <a:bodyPr wrap="square" rtlCol="0" anchor="ctr"/>
+          <a:lstStyle/>
+          <a:p>
+            <a:pPr indent="0" marL="0">
+              <a:buNone/>
+            </a:pPr>
+            <a:r>
+              <a:rPr lang="en-US" sz="1350" i="1" dirty="0">
                 <a:solidFill>
                   <a:srgbClr val="6E6A63"/>
                 </a:solidFill>
@@ -3454,87 +3724,9 @@
                 <a:ea typeface="Calibri" pitchFamily="34" charset="-122"/>
                 <a:cs typeface="Calibri" pitchFamily="34" charset="-120"/>
               </a:rPr>
-              <a:t>Revisión técnica y de mercado</a:t>
-            </a:r>
-            <a:endParaRPr lang="en-US" sz="1400" dirty="0"/>
-          </a:p>
-        </p:txBody>
-      </p:sp>
-      <p:sp>
-        <p:nvSpPr>
-          <p:cNvPr id="11" name="Text 9"/>
-          <p:cNvSpPr/>
-          <p:nvPr/>
-        </p:nvSpPr>
-        <p:spPr>
-          <a:xfrm>
-            <a:off x="822960" y="5440680"/>
-            <a:ext cx="10515600" cy="640080"/>
-          </a:xfrm>
-          <a:prstGeom prst="rect">
-            <a:avLst/>
-          </a:prstGeom>
-          <a:noFill/>
-          <a:ln/>
-        </p:spPr>
-        <p:txBody>
-          <a:bodyPr wrap="square" rtlCol="0" anchor="ctr"/>
-          <a:lstStyle/>
-          <a:p>
-            <a:pPr indent="0" marL="0">
-              <a:buNone/>
-            </a:pPr>
-            <a:r>
-              <a:rPr lang="en-US" sz="1500" dirty="0">
-                <a:solidFill>
-                  <a:srgbClr val="22201D"/>
-                </a:solidFill>
-                <a:latin typeface="Calibri" pitchFamily="34" charset="0"/>
-                <a:ea typeface="Calibri" pitchFamily="34" charset="-122"/>
-                <a:cs typeface="Calibri" pitchFamily="34" charset="-120"/>
-              </a:rPr>
-              <a:t>El clausulado incorpora las observaciones del área de contratación del Ayuntamiento de Pozuelo de Alarcón, que son las que dieron forma a esta versión.</a:t>
-            </a:r>
-            <a:endParaRPr lang="en-US" sz="1500" dirty="0"/>
-          </a:p>
-        </p:txBody>
-      </p:sp>
-      <p:sp>
-        <p:nvSpPr>
-          <p:cNvPr id="12" name="Text 10"/>
-          <p:cNvSpPr/>
-          <p:nvPr/>
-        </p:nvSpPr>
-        <p:spPr>
-          <a:xfrm>
-            <a:off x="822960" y="5989320"/>
-            <a:ext cx="10515600" cy="548640"/>
-          </a:xfrm>
-          <a:prstGeom prst="rect">
-            <a:avLst/>
-          </a:prstGeom>
-          <a:noFill/>
-          <a:ln/>
-        </p:spPr>
-        <p:txBody>
-          <a:bodyPr wrap="square" rtlCol="0" anchor="ctr"/>
-          <a:lstStyle/>
-          <a:p>
-            <a:pPr indent="0" marL="0">
-              <a:buNone/>
-            </a:pPr>
-            <a:r>
-              <a:rPr lang="en-US" sz="1400" i="1" dirty="0">
-                <a:solidFill>
-                  <a:srgbClr val="6E6A63"/>
-                </a:solidFill>
-                <a:latin typeface="Calibri" pitchFamily="34" charset="0"/>
-                <a:ea typeface="Calibri" pitchFamily="34" charset="-122"/>
-                <a:cs typeface="Calibri" pitchFamily="34" charset="-120"/>
-              </a:rPr>
-              <a:t>Publicado y firmado por Miguel Ángel Domínguez Castellano.</a:t>
-            </a:r>
-            <a:endParaRPr lang="en-US" sz="1400" dirty="0"/>
+              <a:t>El área de contratación del Ayuntamiento de Pozuelo de Alarcón no figura como autora y sin embargo ha determinado la forma del documento más que ninguna otra aportación: sus tres objeciones son la razón de ser de esta versión.</a:t>
+            </a:r>
+            <a:endParaRPr lang="en-US" sz="1350" dirty="0"/>
           </a:p>
         </p:txBody>
       </p:sp>
@@ -3549,6 +3741,355 @@
 <file path=ppt/slides/slide13.xml><?xml version="1.0" encoding="utf-8"?>
 <p:sld xmlns:a="http://schemas.openxmlformats.org/drawingml/2006/main" xmlns:r="http://schemas.openxmlformats.org/officeDocument/2006/relationships" xmlns:p="http://schemas.openxmlformats.org/presentationml/2006/main">
   <p:cSld name="Slide 13">
+    <p:bg>
+      <p:bgPr>
+        <a:solidFill>
+          <a:srgbClr val="FFFFFF"/>
+        </a:solidFill>
+      </p:bgPr>
+    </p:bg>
+    <p:spTree>
+      <p:nvGrpSpPr>
+        <p:cNvPr id="1" name=""/>
+        <p:cNvGrpSpPr/>
+        <p:nvPr/>
+      </p:nvGrpSpPr>
+      <p:grpSpPr>
+        <a:xfrm>
+          <a:off x="0" y="0"/>
+          <a:ext cx="0" cy="0"/>
+          <a:chOff x="0" y="0"/>
+          <a:chExt cx="0" cy="0"/>
+        </a:xfrm>
+      </p:grpSpPr>
+      <p:sp>
+        <p:nvSpPr>
+          <p:cNvPr id="2" name="Text 0"/>
+          <p:cNvSpPr/>
+          <p:nvPr/>
+        </p:nvSpPr>
+        <p:spPr>
+          <a:xfrm>
+            <a:off x="822960" y="502920"/>
+            <a:ext cx="10515600" cy="822960"/>
+          </a:xfrm>
+          <a:prstGeom prst="rect">
+            <a:avLst/>
+          </a:prstGeom>
+          <a:noFill/>
+          <a:ln/>
+        </p:spPr>
+        <p:txBody>
+          <a:bodyPr wrap="square" rtlCol="0" anchor="ctr"/>
+          <a:lstStyle/>
+          <a:p>
+            <a:pPr indent="0" marL="0">
+              <a:buNone/>
+            </a:pPr>
+            <a:r>
+              <a:rPr lang="en-US" sz="3600" b="1" dirty="0">
+                <a:solidFill>
+                  <a:srgbClr val="1F3864"/>
+                </a:solidFill>
+                <a:latin typeface="Georgia" pitchFamily="34" charset="0"/>
+                <a:ea typeface="Georgia" pitchFamily="34" charset="-122"/>
+                <a:cs typeface="Georgia" pitchFamily="34" charset="-120"/>
+              </a:rPr>
+              <a:t>Uso de inteligencia artificial, y cómo debe usarse esto</a:t>
+            </a:r>
+            <a:endParaRPr lang="en-US" sz="3600" dirty="0"/>
+          </a:p>
+        </p:txBody>
+      </p:sp>
+      <p:sp>
+        <p:nvSpPr>
+          <p:cNvPr id="3" name="Shape 1"/>
+          <p:cNvSpPr/>
+          <p:nvPr/>
+        </p:nvSpPr>
+        <p:spPr>
+          <a:xfrm>
+            <a:off x="822960" y="1417320"/>
+            <a:ext cx="10515600" cy="1783080"/>
+          </a:xfrm>
+          <a:prstGeom prst="roundRect">
+            <a:avLst>
+              <a:gd name="adj" fmla="val 5128"/>
+            </a:avLst>
+          </a:prstGeom>
+          <a:solidFill>
+            <a:srgbClr val="EDF1F8"/>
+          </a:solidFill>
+          <a:ln/>
+        </p:spPr>
+      </p:sp>
+      <p:sp>
+        <p:nvSpPr>
+          <p:cNvPr id="4" name="Text 2"/>
+          <p:cNvSpPr/>
+          <p:nvPr/>
+        </p:nvSpPr>
+        <p:spPr>
+          <a:xfrm>
+            <a:off x="1188720" y="1645920"/>
+            <a:ext cx="9784080" cy="365760"/>
+          </a:xfrm>
+          <a:prstGeom prst="rect">
+            <a:avLst/>
+          </a:prstGeom>
+          <a:noFill/>
+          <a:ln/>
+        </p:spPr>
+        <p:txBody>
+          <a:bodyPr wrap="square" rtlCol="0" anchor="ctr"/>
+          <a:lstStyle/>
+          <a:p>
+            <a:pPr indent="0" marL="0">
+              <a:buNone/>
+            </a:pPr>
+            <a:r>
+              <a:rPr lang="en-US" sz="1500" b="1" dirty="0">
+                <a:solidFill>
+                  <a:srgbClr val="1F3864"/>
+                </a:solidFill>
+                <a:latin typeface="Calibri" pitchFamily="34" charset="0"/>
+                <a:ea typeface="Calibri" pitchFamily="34" charset="-122"/>
+                <a:cs typeface="Calibri" pitchFamily="34" charset="-120"/>
+              </a:rPr>
+              <a:t>En la elaboración de este documento se han utilizado sistemas de inteligencia artificial:</a:t>
+            </a:r>
+            <a:endParaRPr lang="en-US" sz="1500" dirty="0"/>
+          </a:p>
+        </p:txBody>
+      </p:sp>
+      <p:sp>
+        <p:nvSpPr>
+          <p:cNvPr id="5" name="Text 3"/>
+          <p:cNvSpPr/>
+          <p:nvPr/>
+        </p:nvSpPr>
+        <p:spPr>
+          <a:xfrm>
+            <a:off x="1188720" y="2011680"/>
+            <a:ext cx="9784080" cy="1051560"/>
+          </a:xfrm>
+          <a:prstGeom prst="rect">
+            <a:avLst/>
+          </a:prstGeom>
+          <a:noFill/>
+          <a:ln/>
+        </p:spPr>
+        <p:txBody>
+          <a:bodyPr wrap="square" rtlCol="0" anchor="ctr"/>
+          <a:lstStyle/>
+          <a:p>
+            <a:pPr indent="0" marL="0">
+              <a:buNone/>
+            </a:pPr>
+            <a:r>
+              <a:rPr lang="en-US" sz="1450" dirty="0">
+                <a:solidFill>
+                  <a:srgbClr val="22201D"/>
+                </a:solidFill>
+                <a:latin typeface="Calibri" pitchFamily="34" charset="0"/>
+                <a:ea typeface="Calibri" pitchFamily="34" charset="-122"/>
+                <a:cs typeface="Calibri" pitchFamily="34" charset="-120"/>
+              </a:rPr>
+              <a:t>el clon digital («second brain») de Miguel Ángel Domínguez, determinante en la recuperación del material disperso, la investigación jurídica, la verificación de las fuentes, la crítica adversarial del texto y la redacción de los borradores. Las decisiones, el criterio jurídico y la responsabilidad son de las personas que lo firman.</a:t>
+            </a:r>
+            <a:endParaRPr lang="en-US" sz="1450" dirty="0"/>
+          </a:p>
+        </p:txBody>
+      </p:sp>
+      <p:sp>
+        <p:nvSpPr>
+          <p:cNvPr id="6" name="Text 4"/>
+          <p:cNvSpPr/>
+          <p:nvPr/>
+        </p:nvSpPr>
+        <p:spPr>
+          <a:xfrm>
+            <a:off x="822960" y="3337560"/>
+            <a:ext cx="10515600" cy="685800"/>
+          </a:xfrm>
+          <a:prstGeom prst="rect">
+            <a:avLst/>
+          </a:prstGeom>
+          <a:noFill/>
+          <a:ln/>
+        </p:spPr>
+        <p:txBody>
+          <a:bodyPr wrap="square" rtlCol="0" anchor="ctr"/>
+          <a:lstStyle/>
+          <a:p>
+            <a:pPr indent="0" marL="0">
+              <a:buNone/>
+            </a:pPr>
+            <a:r>
+              <a:rPr lang="en-US" sz="1400" i="1" dirty="0">
+                <a:solidFill>
+                  <a:srgbClr val="6E6A63"/>
+                </a:solidFill>
+                <a:latin typeface="Calibri" pitchFamily="34" charset="0"/>
+                <a:ea typeface="Calibri" pitchFamily="34" charset="-122"/>
+                <a:cs typeface="Calibri" pitchFamily="34" charset="-120"/>
+              </a:rPr>
+              <a:t>Se declara aunque no sea obligatorio: el art. 50.4 del Reglamento (UE) 2024/1689 exime de divulgarlo cuando hay revisión humana y responsabilidad editorial. Se divulga igualmente, porque un documento que exige transparencia de IA no puede ocultarla en sí mismo.</a:t>
+            </a:r>
+            <a:endParaRPr lang="en-US" sz="1400" dirty="0"/>
+          </a:p>
+        </p:txBody>
+      </p:sp>
+      <p:sp>
+        <p:nvSpPr>
+          <p:cNvPr id="7" name="Shape 5"/>
+          <p:cNvSpPr/>
+          <p:nvPr/>
+        </p:nvSpPr>
+        <p:spPr>
+          <a:xfrm>
+            <a:off x="822960" y="4160520"/>
+            <a:ext cx="10515600" cy="1600200"/>
+          </a:xfrm>
+          <a:prstGeom prst="roundRect">
+            <a:avLst>
+              <a:gd name="adj" fmla="val 5714"/>
+            </a:avLst>
+          </a:prstGeom>
+          <a:solidFill>
+            <a:srgbClr val="FDF6E6"/>
+          </a:solidFill>
+          <a:ln/>
+        </p:spPr>
+      </p:sp>
+      <p:sp>
+        <p:nvSpPr>
+          <p:cNvPr id="8" name="Text 6"/>
+          <p:cNvSpPr/>
+          <p:nvPr/>
+        </p:nvSpPr>
+        <p:spPr>
+          <a:xfrm>
+            <a:off x="1188720" y="4389120"/>
+            <a:ext cx="9784080" cy="457200"/>
+          </a:xfrm>
+          <a:prstGeom prst="rect">
+            <a:avLst/>
+          </a:prstGeom>
+          <a:noFill/>
+          <a:ln/>
+        </p:spPr>
+        <p:txBody>
+          <a:bodyPr wrap="square" rtlCol="0" anchor="ctr"/>
+          <a:lstStyle/>
+          <a:p>
+            <a:pPr indent="0" marL="0">
+              <a:buNone/>
+            </a:pPr>
+            <a:r>
+              <a:rPr lang="en-US" sz="1800" b="1" dirty="0">
+                <a:solidFill>
+                  <a:srgbClr val="22201D"/>
+                </a:solidFill>
+                <a:latin typeface="Georgia" pitchFamily="34" charset="0"/>
+                <a:ea typeface="Georgia" pitchFamily="34" charset="-122"/>
+                <a:cs typeface="Georgia" pitchFamily="34" charset="-120"/>
+              </a:rPr>
+              <a:t>Se publica «tal cual» (as is). Se recomienda su lectura y su uso — y con la misma firmeza, NO copiarlo sin entenderlo.</a:t>
+            </a:r>
+            <a:endParaRPr lang="en-US" sz="1800" dirty="0"/>
+          </a:p>
+        </p:txBody>
+      </p:sp>
+      <p:sp>
+        <p:nvSpPr>
+          <p:cNvPr id="9" name="Text 7"/>
+          <p:cNvSpPr/>
+          <p:nvPr/>
+        </p:nvSpPr>
+        <p:spPr>
+          <a:xfrm>
+            <a:off x="1188720" y="4892040"/>
+            <a:ext cx="9784080" cy="777240"/>
+          </a:xfrm>
+          <a:prstGeom prst="rect">
+            <a:avLst/>
+          </a:prstGeom>
+          <a:noFill/>
+          <a:ln/>
+        </p:spPr>
+        <p:txBody>
+          <a:bodyPr wrap="square" rtlCol="0" anchor="ctr"/>
+          <a:lstStyle/>
+          <a:p>
+            <a:pPr indent="0" marL="0">
+              <a:buNone/>
+            </a:pPr>
+            <a:r>
+              <a:rPr lang="en-US" sz="1450" dirty="0">
+                <a:solidFill>
+                  <a:srgbClr val="22201D"/>
+                </a:solidFill>
+                <a:latin typeface="Calibri" pitchFamily="34" charset="0"/>
+                <a:ea typeface="Calibri" pitchFamily="34" charset="-122"/>
+                <a:cs typeface="Calibri" pitchFamily="34" charset="-120"/>
+              </a:rPr>
+              <a:t>Una cláusula copiada sin necesidad acreditada no protege: añade un motivo de recurso. Una exigencia copiada sin contrastar con el mercado no es más ambiciosa, es más restrictiva. Una obligación que nadie verifica es peor que no tenerla.</a:t>
+            </a:r>
+            <a:endParaRPr lang="en-US" sz="1450" dirty="0"/>
+          </a:p>
+        </p:txBody>
+      </p:sp>
+      <p:sp>
+        <p:nvSpPr>
+          <p:cNvPr id="10" name="Text 8"/>
+          <p:cNvSpPr/>
+          <p:nvPr/>
+        </p:nvSpPr>
+        <p:spPr>
+          <a:xfrm>
+            <a:off x="822960" y="5989320"/>
+            <a:ext cx="10515600" cy="548640"/>
+          </a:xfrm>
+          <a:prstGeom prst="rect">
+            <a:avLst/>
+          </a:prstGeom>
+          <a:noFill/>
+          <a:ln/>
+        </p:spPr>
+        <p:txBody>
+          <a:bodyPr wrap="square" rtlCol="0" anchor="ctr"/>
+          <a:lstStyle/>
+          <a:p>
+            <a:pPr indent="0" marL="0">
+              <a:buNone/>
+            </a:pPr>
+            <a:r>
+              <a:rPr lang="en-US" sz="1400" i="1" dirty="0">
+                <a:solidFill>
+                  <a:srgbClr val="6E6A63"/>
+                </a:solidFill>
+                <a:latin typeface="Calibri" pitchFamily="34" charset="0"/>
+                <a:ea typeface="Calibri" pitchFamily="34" charset="-122"/>
+                <a:cs typeface="Calibri" pitchFamily="34" charset="-120"/>
+              </a:rPr>
+              <a:t>No es asesoramiento legal, y no sustituye a los informes preceptivos de ninguna administración.</a:t>
+            </a:r>
+            <a:endParaRPr lang="en-US" sz="1400" dirty="0"/>
+          </a:p>
+        </p:txBody>
+      </p:sp>
+    </p:spTree>
+  </p:cSld>
+  <p:clrMapOvr>
+    <a:masterClrMapping/>
+  </p:clrMapOvr>
+</p:sld>
+</file>
+
+<file path=ppt/slides/slide14.xml><?xml version="1.0" encoding="utf-8"?>
+<p:sld xmlns:a="http://schemas.openxmlformats.org/drawingml/2006/main" xmlns:r="http://schemas.openxmlformats.org/officeDocument/2006/relationships" xmlns:p="http://schemas.openxmlformats.org/presentationml/2006/main">
+  <p:cSld name="Slide 14">
     <p:bg>
       <p:bgPr>
         <a:solidFill>

--- a/docs/descargas/presentacion-ai-clauses.pptx
+++ b/docs/descargas/presentacion-ai-clauses.pptx
@@ -3372,7 +3372,7 @@
                 <a:ea typeface="Calibri" pitchFamily="34" charset="-122"/>
                 <a:cs typeface="Calibri" pitchFamily="34" charset="-120"/>
               </a:rPr>
-              <a:t>Concejal de Administración Digital, Calidad e Innovación · Ayuntamiento de Pozuelo de Alarcón</a:t>
+              <a:t>Concejal de Administración Digital, Calidad e Innovación · Ayuntamiento de Pozuelo de Alarcón  ·  pozuelodealarcon.org</a:t>
             </a:r>
             <a:endParaRPr lang="en-US" sz="1300" dirty="0"/>
           </a:p>
@@ -3509,7 +3509,7 @@
                 <a:ea typeface="Calibri" pitchFamily="34" charset="-122"/>
                 <a:cs typeface="Calibri" pitchFamily="34" charset="-120"/>
               </a:rPr>
-              <a:t>Profesor e investigador de la Escuela Politécnica Superior · Universidad Francisco de Vitoria</a:t>
+              <a:t>Profesor e investigador de la Escuela Politécnica Superior · Universidad Francisco de Vitoria  ·  ufv.es</a:t>
             </a:r>
             <a:endParaRPr lang="en-US" sz="1300" dirty="0"/>
           </a:p>
@@ -3646,7 +3646,7 @@
                 <a:ea typeface="Calibri" pitchFamily="34" charset="-122"/>
                 <a:cs typeface="Calibri" pitchFamily="34" charset="-120"/>
               </a:rPr>
-              <a:t>CEO de Add4u · Presidente de Alastria · Presidente del Clúster de Blockchain de la Comunidad de Madrid</a:t>
+              <a:t>CEO de Add4u · Presidente de Alastria · Presidente del Clúster de Blockchain de la Comunidad de Madrid  ·  miguelangeldominguez.info</a:t>
             </a:r>
             <a:endParaRPr lang="en-US" sz="1300" dirty="0"/>
           </a:p>

--- a/docs/descargas/presentacion-ai-clauses.pptx
+++ b/docs/descargas/presentacion-ai-clauses.pptx
@@ -2722,12 +2722,12 @@
         </p:nvSpPr>
         <p:spPr>
           <a:xfrm>
-            <a:off x="822960" y="1600200"/>
-            <a:ext cx="10515600" cy="1234440"/>
+            <a:off x="822960" y="1417320"/>
+            <a:ext cx="10515600" cy="987552"/>
           </a:xfrm>
           <a:prstGeom prst="roundRect">
             <a:avLst>
-              <a:gd name="adj" fmla="val 7407"/>
+              <a:gd name="adj" fmla="val 9259"/>
             </a:avLst>
           </a:prstGeom>
           <a:solidFill>
@@ -2744,24 +2744,24 @@
         </p:nvSpPr>
         <p:spPr>
           <a:xfrm>
-            <a:off x="1097280" y="1737360"/>
-            <a:ext cx="3108960" cy="960120"/>
-          </a:xfrm>
-          <a:prstGeom prst="rect">
-            <a:avLst/>
-          </a:prstGeom>
-          <a:noFill/>
-          <a:ln/>
-        </p:spPr>
-        <p:txBody>
-          <a:bodyPr wrap="square" rtlCol="0" anchor="ctr"/>
-          <a:lstStyle/>
-          <a:p>
-            <a:pPr indent="0" marL="0">
-              <a:buNone/>
-            </a:pPr>
-            <a:r>
-              <a:rPr lang="en-US" sz="1800" b="1" dirty="0">
+            <a:off x="1097280" y="1527048"/>
+            <a:ext cx="3108960" cy="768096"/>
+          </a:xfrm>
+          <a:prstGeom prst="rect">
+            <a:avLst/>
+          </a:prstGeom>
+          <a:noFill/>
+          <a:ln/>
+        </p:spPr>
+        <p:txBody>
+          <a:bodyPr wrap="square" rtlCol="0" anchor="ctr"/>
+          <a:lstStyle/>
+          <a:p>
+            <a:pPr indent="0" marL="0">
+              <a:buNone/>
+            </a:pPr>
+            <a:r>
+              <a:rPr lang="en-US" sz="1650" b="1" dirty="0">
                 <a:solidFill>
                   <a:srgbClr val="1F3864"/>
                 </a:solidFill>
@@ -2771,7 +2771,7 @@
               </a:rPr>
               <a:t>El clausulado completo</a:t>
             </a:r>
-            <a:endParaRPr lang="en-US" sz="1800" dirty="0"/>
+            <a:endParaRPr lang="en-US" sz="1650" dirty="0"/>
           </a:p>
         </p:txBody>
       </p:sp>
@@ -2783,24 +2783,24 @@
         </p:nvSpPr>
         <p:spPr>
           <a:xfrm>
-            <a:off x="4297680" y="1737360"/>
-            <a:ext cx="4937760" cy="960120"/>
-          </a:xfrm>
-          <a:prstGeom prst="rect">
-            <a:avLst/>
-          </a:prstGeom>
-          <a:noFill/>
-          <a:ln/>
-        </p:spPr>
-        <p:txBody>
-          <a:bodyPr wrap="square" rtlCol="0" anchor="ctr"/>
-          <a:lstStyle/>
-          <a:p>
-            <a:pPr indent="0" marL="0">
-              <a:buNone/>
-            </a:pPr>
-            <a:r>
-              <a:rPr lang="en-US" sz="1400" dirty="0">
+            <a:off x="4297680" y="1527048"/>
+            <a:ext cx="4937760" cy="768096"/>
+          </a:xfrm>
+          <a:prstGeom prst="rect">
+            <a:avLst/>
+          </a:prstGeom>
+          <a:noFill/>
+          <a:ln/>
+        </p:spPr>
+        <p:txBody>
+          <a:bodyPr wrap="square" rtlCol="0" anchor="ctr"/>
+          <a:lstStyle/>
+          <a:p>
+            <a:pPr indent="0" marL="0">
+              <a:buNone/>
+            </a:pPr>
+            <a:r>
+              <a:rPr lang="en-US" sz="1280" dirty="0">
                 <a:solidFill>
                   <a:srgbClr val="22201D"/>
                 </a:solidFill>
@@ -2810,7 +2810,7 @@
               </a:rPr>
               <a:t>Catálogo, memoria justificativa para la Intervención, circuito del expediente, caso piloto y anexos con todos los modelos.</a:t>
             </a:r>
-            <a:endParaRPr lang="en-US" sz="1400" dirty="0"/>
+            <a:endParaRPr lang="en-US" sz="1280" dirty="0"/>
           </a:p>
         </p:txBody>
       </p:sp>
@@ -2822,24 +2822,24 @@
         </p:nvSpPr>
         <p:spPr>
           <a:xfrm>
-            <a:off x="9326880" y="1737360"/>
-            <a:ext cx="1828800" cy="960120"/>
-          </a:xfrm>
-          <a:prstGeom prst="rect">
-            <a:avLst/>
-          </a:prstGeom>
-          <a:noFill/>
-          <a:ln/>
-        </p:spPr>
-        <p:txBody>
-          <a:bodyPr wrap="square" rtlCol="0" anchor="ctr"/>
-          <a:lstStyle/>
-          <a:p>
-            <a:pPr indent="0" marL="0">
-              <a:buNone/>
-            </a:pPr>
-            <a:r>
-              <a:rPr lang="en-US" sz="1250" i="1" dirty="0">
+            <a:off x="9326880" y="1527048"/>
+            <a:ext cx="1828800" cy="768096"/>
+          </a:xfrm>
+          <a:prstGeom prst="rect">
+            <a:avLst/>
+          </a:prstGeom>
+          <a:noFill/>
+          <a:ln/>
+        </p:spPr>
+        <p:txBody>
+          <a:bodyPr wrap="square" rtlCol="0" anchor="ctr"/>
+          <a:lstStyle/>
+          <a:p>
+            <a:pPr indent="0" marL="0">
+              <a:buNone/>
+            </a:pPr>
+            <a:r>
+              <a:rPr lang="en-US" sz="1120" i="1" dirty="0">
                 <a:solidFill>
                   <a:srgbClr val="6E6A63"/>
                 </a:solidFill>
@@ -2849,7 +2849,7 @@
               </a:rPr>
               <a:t>Quien redacta y quien fiscaliza</a:t>
             </a:r>
-            <a:endParaRPr lang="en-US" sz="1250" dirty="0"/>
+            <a:endParaRPr lang="en-US" sz="1120" dirty="0"/>
           </a:p>
         </p:txBody>
       </p:sp>
@@ -2861,12 +2861,12 @@
         </p:nvSpPr>
         <p:spPr>
           <a:xfrm>
-            <a:off x="822960" y="3017520"/>
-            <a:ext cx="10515600" cy="1234440"/>
+            <a:off x="822960" y="2560320"/>
+            <a:ext cx="10515600" cy="987552"/>
           </a:xfrm>
           <a:prstGeom prst="roundRect">
             <a:avLst>
-              <a:gd name="adj" fmla="val 7407"/>
+              <a:gd name="adj" fmla="val 9259"/>
             </a:avLst>
           </a:prstGeom>
           <a:solidFill>
@@ -2883,24 +2883,24 @@
         </p:nvSpPr>
         <p:spPr>
           <a:xfrm>
-            <a:off x="1097280" y="3154680"/>
-            <a:ext cx="3108960" cy="960120"/>
-          </a:xfrm>
-          <a:prstGeom prst="rect">
-            <a:avLst/>
-          </a:prstGeom>
-          <a:noFill/>
-          <a:ln/>
-        </p:spPr>
-        <p:txBody>
-          <a:bodyPr wrap="square" rtlCol="0" anchor="ctr"/>
-          <a:lstStyle/>
-          <a:p>
-            <a:pPr indent="0" marL="0">
-              <a:buNone/>
-            </a:pPr>
-            <a:r>
-              <a:rPr lang="en-US" sz="1800" b="1" dirty="0">
+            <a:off x="1097280" y="2670048"/>
+            <a:ext cx="3108960" cy="768096"/>
+          </a:xfrm>
+          <a:prstGeom prst="rect">
+            <a:avLst/>
+          </a:prstGeom>
+          <a:noFill/>
+          <a:ln/>
+        </p:spPr>
+        <p:txBody>
+          <a:bodyPr wrap="square" rtlCol="0" anchor="ctr"/>
+          <a:lstStyle/>
+          <a:p>
+            <a:pPr indent="0" marL="0">
+              <a:buNone/>
+            </a:pPr>
+            <a:r>
+              <a:rPr lang="en-US" sz="1650" b="1" dirty="0">
                 <a:solidFill>
                   <a:srgbClr val="1F3864"/>
                 </a:solidFill>
@@ -2908,9 +2908,9 @@
                 <a:ea typeface="Georgia" pitchFamily="34" charset="-122"/>
                 <a:cs typeface="Georgia" pitchFamily="34" charset="-120"/>
               </a:rPr>
-              <a:t>El resumen y la guía de uso</a:t>
-            </a:r>
-            <a:endParaRPr lang="en-US" sz="1800" dirty="0"/>
+              <a:t>La guía municipal · 20 páginas</a:t>
+            </a:r>
+            <a:endParaRPr lang="en-US" sz="1650" dirty="0"/>
           </a:p>
         </p:txBody>
       </p:sp>
@@ -2922,24 +2922,24 @@
         </p:nvSpPr>
         <p:spPr>
           <a:xfrm>
-            <a:off x="4297680" y="3154680"/>
-            <a:ext cx="4937760" cy="960120"/>
-          </a:xfrm>
-          <a:prstGeom prst="rect">
-            <a:avLst/>
-          </a:prstGeom>
-          <a:noFill/>
-          <a:ln/>
-        </p:spPr>
-        <p:txBody>
-          <a:bodyPr wrap="square" rtlCol="0" anchor="ctr"/>
-          <a:lstStyle/>
-          <a:p>
-            <a:pPr indent="0" marL="0">
-              <a:buNone/>
-            </a:pPr>
-            <a:r>
-              <a:rPr lang="en-US" sz="1400" dirty="0">
+            <a:off x="4297680" y="2670048"/>
+            <a:ext cx="4937760" cy="768096"/>
+          </a:xfrm>
+          <a:prstGeom prst="rect">
+            <a:avLst/>
+          </a:prstGeom>
+          <a:noFill/>
+          <a:ln/>
+        </p:spPr>
+        <p:txBody>
+          <a:bodyPr wrap="square" rtlCol="0" anchor="ctr"/>
+          <a:lstStyle/>
+          <a:p>
+            <a:pPr indent="0" marL="0">
+              <a:buNone/>
+            </a:pPr>
+            <a:r>
+              <a:rPr lang="en-US" sz="1280" dirty="0">
                 <a:solidFill>
                   <a:srgbClr val="22201D"/>
                 </a:solidFill>
@@ -2947,9 +2947,9 @@
                 <a:ea typeface="Calibri" pitchFamily="34" charset="-122"/>
                 <a:cs typeface="Calibri" pitchFamily="34" charset="-120"/>
               </a:rPr>
-              <a:t>La primera parte del documento, escrita para quien no sabe nada de contratación ni de tecnología.</a:t>
-            </a:r>
-            <a:endParaRPr lang="en-US" sz="1400" dirty="0"/>
+              <a:t>Cómo decidir, motivar, seleccionar, copiar y verificar sin recorrer el catálogo entero.</a:t>
+            </a:r>
+            <a:endParaRPr lang="en-US" sz="1280" dirty="0"/>
           </a:p>
         </p:txBody>
       </p:sp>
@@ -2961,24 +2961,24 @@
         </p:nvSpPr>
         <p:spPr>
           <a:xfrm>
-            <a:off x="9326880" y="3154680"/>
-            <a:ext cx="1828800" cy="960120"/>
-          </a:xfrm>
-          <a:prstGeom prst="rect">
-            <a:avLst/>
-          </a:prstGeom>
-          <a:noFill/>
-          <a:ln/>
-        </p:spPr>
-        <p:txBody>
-          <a:bodyPr wrap="square" rtlCol="0" anchor="ctr"/>
-          <a:lstStyle/>
-          <a:p>
-            <a:pPr indent="0" marL="0">
-              <a:buNone/>
-            </a:pPr>
-            <a:r>
-              <a:rPr lang="en-US" sz="1250" i="1" dirty="0">
+            <a:off x="9326880" y="2670048"/>
+            <a:ext cx="1828800" cy="768096"/>
+          </a:xfrm>
+          <a:prstGeom prst="rect">
+            <a:avLst/>
+          </a:prstGeom>
+          <a:noFill/>
+          <a:ln/>
+        </p:spPr>
+        <p:txBody>
+          <a:bodyPr wrap="square" rtlCol="0" anchor="ctr"/>
+          <a:lstStyle/>
+          <a:p>
+            <a:pPr indent="0" marL="0">
+              <a:buNone/>
+            </a:pPr>
+            <a:r>
+              <a:rPr lang="en-US" sz="1120" i="1" dirty="0">
                 <a:solidFill>
                   <a:srgbClr val="6E6A63"/>
                 </a:solidFill>
@@ -2986,9 +2986,9 @@
                 <a:ea typeface="Calibri" pitchFamily="34" charset="-122"/>
                 <a:cs typeface="Calibri" pitchFamily="34" charset="-120"/>
               </a:rPr>
-              <a:t>Alcaldía, concejalías, prensa</a:t>
-            </a:r>
-            <a:endParaRPr lang="en-US" sz="1250" dirty="0"/>
+              <a:t>Concejalía, Contratación, Intervención y TI</a:t>
+            </a:r>
+            <a:endParaRPr lang="en-US" sz="1120" dirty="0"/>
           </a:p>
         </p:txBody>
       </p:sp>
@@ -3000,12 +3000,12 @@
         </p:nvSpPr>
         <p:spPr>
           <a:xfrm>
-            <a:off x="822960" y="4434840"/>
-            <a:ext cx="10515600" cy="1234440"/>
+            <a:off x="822960" y="3703320"/>
+            <a:ext cx="10515600" cy="987552"/>
           </a:xfrm>
           <a:prstGeom prst="roundRect">
             <a:avLst>
-              <a:gd name="adj" fmla="val 7407"/>
+              <a:gd name="adj" fmla="val 9259"/>
             </a:avLst>
           </a:prstGeom>
           <a:solidFill>
@@ -3022,24 +3022,24 @@
         </p:nvSpPr>
         <p:spPr>
           <a:xfrm>
-            <a:off x="1097280" y="4572000"/>
-            <a:ext cx="3108960" cy="960120"/>
-          </a:xfrm>
-          <a:prstGeom prst="rect">
-            <a:avLst/>
-          </a:prstGeom>
-          <a:noFill/>
-          <a:ln/>
-        </p:spPr>
-        <p:txBody>
-          <a:bodyPr wrap="square" rtlCol="0" anchor="ctr"/>
-          <a:lstStyle/>
-          <a:p>
-            <a:pPr indent="0" marL="0">
-              <a:buNone/>
-            </a:pPr>
-            <a:r>
-              <a:rPr lang="en-US" sz="1800" b="1" dirty="0">
+            <a:off x="1097280" y="3813048"/>
+            <a:ext cx="3108960" cy="768096"/>
+          </a:xfrm>
+          <a:prstGeom prst="rect">
+            <a:avLst/>
+          </a:prstGeom>
+          <a:noFill/>
+          <a:ln/>
+        </p:spPr>
+        <p:txBody>
+          <a:bodyPr wrap="square" rtlCol="0" anchor="ctr"/>
+          <a:lstStyle/>
+          <a:p>
+            <a:pPr indent="0" marL="0">
+              <a:buNone/>
+            </a:pPr>
+            <a:r>
+              <a:rPr lang="en-US" sz="1650" b="1" dirty="0">
                 <a:solidFill>
                   <a:srgbClr val="1F3864"/>
                 </a:solidFill>
@@ -3047,9 +3047,9 @@
                 <a:ea typeface="Georgia" pitchFamily="34" charset="-122"/>
                 <a:cs typeface="Georgia" pitchFamily="34" charset="-120"/>
               </a:rPr>
-              <a:t>Esta presentación</a:t>
-            </a:r>
-            <a:endParaRPr lang="en-US" sz="1800" dirty="0"/>
+              <a:t>El resumen y la guía de uso</a:t>
+            </a:r>
+            <a:endParaRPr lang="en-US" sz="1650" dirty="0"/>
           </a:p>
         </p:txBody>
       </p:sp>
@@ -3061,24 +3061,24 @@
         </p:nvSpPr>
         <p:spPr>
           <a:xfrm>
-            <a:off x="4297680" y="4572000"/>
-            <a:ext cx="4937760" cy="960120"/>
-          </a:xfrm>
-          <a:prstGeom prst="rect">
-            <a:avLst/>
-          </a:prstGeom>
-          <a:noFill/>
-          <a:ln/>
-        </p:spPr>
-        <p:txBody>
-          <a:bodyPr wrap="square" rtlCol="0" anchor="ctr"/>
-          <a:lstStyle/>
-          <a:p>
-            <a:pPr indent="0" marL="0">
-              <a:buNone/>
-            </a:pPr>
-            <a:r>
-              <a:rPr lang="en-US" sz="1400" dirty="0">
+            <a:off x="4297680" y="3813048"/>
+            <a:ext cx="4937760" cy="768096"/>
+          </a:xfrm>
+          <a:prstGeom prst="rect">
+            <a:avLst/>
+          </a:prstGeom>
+          <a:noFill/>
+          <a:ln/>
+        </p:spPr>
+        <p:txBody>
+          <a:bodyPr wrap="square" rtlCol="0" anchor="ctr"/>
+          <a:lstStyle/>
+          <a:p>
+            <a:pPr indent="0" marL="0">
+              <a:buNone/>
+            </a:pPr>
+            <a:r>
+              <a:rPr lang="en-US" sz="1280" dirty="0">
                 <a:solidFill>
                   <a:srgbClr val="22201D"/>
                 </a:solidFill>
@@ -3086,9 +3086,9 @@
                 <a:ea typeface="Calibri" pitchFamily="34" charset="-122"/>
                 <a:cs typeface="Calibri" pitchFamily="34" charset="-120"/>
               </a:rPr>
-              <a:t>El problema y la solución, sin que haga falta saber nada previo.</a:t>
-            </a:r>
-            <a:endParaRPr lang="en-US" sz="1400" dirty="0"/>
+              <a:t>La primera parte del documento, escrita para quien no sabe nada de contratación ni de tecnología.</a:t>
+            </a:r>
+            <a:endParaRPr lang="en-US" sz="1280" dirty="0"/>
           </a:p>
         </p:txBody>
       </p:sp>
@@ -3100,24 +3100,24 @@
         </p:nvSpPr>
         <p:spPr>
           <a:xfrm>
-            <a:off x="9326880" y="4572000"/>
-            <a:ext cx="1828800" cy="960120"/>
-          </a:xfrm>
-          <a:prstGeom prst="rect">
-            <a:avLst/>
-          </a:prstGeom>
-          <a:noFill/>
-          <a:ln/>
-        </p:spPr>
-        <p:txBody>
-          <a:bodyPr wrap="square" rtlCol="0" anchor="ctr"/>
-          <a:lstStyle/>
-          <a:p>
-            <a:pPr indent="0" marL="0">
-              <a:buNone/>
-            </a:pPr>
-            <a:r>
-              <a:rPr lang="en-US" sz="1250" i="1" dirty="0">
+            <a:off x="9326880" y="3813048"/>
+            <a:ext cx="1828800" cy="768096"/>
+          </a:xfrm>
+          <a:prstGeom prst="rect">
+            <a:avLst/>
+          </a:prstGeom>
+          <a:noFill/>
+          <a:ln/>
+        </p:spPr>
+        <p:txBody>
+          <a:bodyPr wrap="square" rtlCol="0" anchor="ctr"/>
+          <a:lstStyle/>
+          <a:p>
+            <a:pPr indent="0" marL="0">
+              <a:buNone/>
+            </a:pPr>
+            <a:r>
+              <a:rPr lang="en-US" sz="1120" i="1" dirty="0">
                 <a:solidFill>
                   <a:srgbClr val="6E6A63"/>
                 </a:solidFill>
@@ -3125,38 +3125,99 @@
                 <a:ea typeface="Calibri" pitchFamily="34" charset="-122"/>
                 <a:cs typeface="Calibri" pitchFamily="34" charset="-120"/>
               </a:rPr>
-              <a:t>Cualquier sala</a:t>
-            </a:r>
-            <a:endParaRPr lang="en-US" sz="1250" dirty="0"/>
-          </a:p>
-        </p:txBody>
-      </p:sp>
-      <p:sp>
-        <p:nvSpPr>
-          <p:cNvPr id="15" name="Text 13"/>
-          <p:cNvSpPr/>
-          <p:nvPr/>
-        </p:nvSpPr>
-        <p:spPr>
-          <a:xfrm>
-            <a:off x="822960" y="5852160"/>
-            <a:ext cx="10515600" cy="640080"/>
-          </a:xfrm>
-          <a:prstGeom prst="rect">
-            <a:avLst/>
-          </a:prstGeom>
-          <a:noFill/>
-          <a:ln/>
-        </p:spPr>
-        <p:txBody>
-          <a:bodyPr wrap="square" rtlCol="0" anchor="ctr"/>
-          <a:lstStyle/>
-          <a:p>
-            <a:pPr indent="0" marL="0">
-              <a:buNone/>
-            </a:pPr>
-            <a:r>
-              <a:rPr lang="en-US" sz="1500" dirty="0">
+              <a:t>Alcaldía, concejalías, prensa</a:t>
+            </a:r>
+            <a:endParaRPr lang="en-US" sz="1120" dirty="0"/>
+          </a:p>
+        </p:txBody>
+      </p:sp>
+      <p:sp>
+        <p:nvSpPr>
+          <p:cNvPr id="15" name="Shape 13"/>
+          <p:cNvSpPr/>
+          <p:nvPr/>
+        </p:nvSpPr>
+        <p:spPr>
+          <a:xfrm>
+            <a:off x="822960" y="4846320"/>
+            <a:ext cx="10515600" cy="987552"/>
+          </a:xfrm>
+          <a:prstGeom prst="roundRect">
+            <a:avLst>
+              <a:gd name="adj" fmla="val 9259"/>
+            </a:avLst>
+          </a:prstGeom>
+          <a:solidFill>
+            <a:srgbClr val="EDF1F8"/>
+          </a:solidFill>
+          <a:ln/>
+        </p:spPr>
+      </p:sp>
+      <p:sp>
+        <p:nvSpPr>
+          <p:cNvPr id="16" name="Text 14"/>
+          <p:cNvSpPr/>
+          <p:nvPr/>
+        </p:nvSpPr>
+        <p:spPr>
+          <a:xfrm>
+            <a:off x="1097280" y="4956048"/>
+            <a:ext cx="3108960" cy="768096"/>
+          </a:xfrm>
+          <a:prstGeom prst="rect">
+            <a:avLst/>
+          </a:prstGeom>
+          <a:noFill/>
+          <a:ln/>
+        </p:spPr>
+        <p:txBody>
+          <a:bodyPr wrap="square" rtlCol="0" anchor="ctr"/>
+          <a:lstStyle/>
+          <a:p>
+            <a:pPr indent="0" marL="0">
+              <a:buNone/>
+            </a:pPr>
+            <a:r>
+              <a:rPr lang="en-US" sz="1650" b="1" dirty="0">
+                <a:solidFill>
+                  <a:srgbClr val="1F3864"/>
+                </a:solidFill>
+                <a:latin typeface="Georgia" pitchFamily="34" charset="0"/>
+                <a:ea typeface="Georgia" pitchFamily="34" charset="-122"/>
+                <a:cs typeface="Georgia" pitchFamily="34" charset="-120"/>
+              </a:rPr>
+              <a:t>Esta presentación</a:t>
+            </a:r>
+            <a:endParaRPr lang="en-US" sz="1650" dirty="0"/>
+          </a:p>
+        </p:txBody>
+      </p:sp>
+      <p:sp>
+        <p:nvSpPr>
+          <p:cNvPr id="17" name="Text 15"/>
+          <p:cNvSpPr/>
+          <p:nvPr/>
+        </p:nvSpPr>
+        <p:spPr>
+          <a:xfrm>
+            <a:off x="4297680" y="4956048"/>
+            <a:ext cx="4937760" cy="768096"/>
+          </a:xfrm>
+          <a:prstGeom prst="rect">
+            <a:avLst/>
+          </a:prstGeom>
+          <a:noFill/>
+          <a:ln/>
+        </p:spPr>
+        <p:txBody>
+          <a:bodyPr wrap="square" rtlCol="0" anchor="ctr"/>
+          <a:lstStyle/>
+          <a:p>
+            <a:pPr indent="0" marL="0">
+              <a:buNone/>
+            </a:pPr>
+            <a:r>
+              <a:rPr lang="en-US" sz="1280" dirty="0">
                 <a:solidFill>
                   <a:srgbClr val="22201D"/>
                 </a:solidFill>
@@ -3164,9 +3225,87 @@
                 <a:ea typeface="Calibri" pitchFamily="34" charset="-122"/>
                 <a:cs typeface="Calibri" pitchFamily="34" charset="-120"/>
               </a:rPr>
+              <a:t>El problema y la solución, sin que haga falta saber nada previo.</a:t>
+            </a:r>
+            <a:endParaRPr lang="en-US" sz="1280" dirty="0"/>
+          </a:p>
+        </p:txBody>
+      </p:sp>
+      <p:sp>
+        <p:nvSpPr>
+          <p:cNvPr id="18" name="Text 16"/>
+          <p:cNvSpPr/>
+          <p:nvPr/>
+        </p:nvSpPr>
+        <p:spPr>
+          <a:xfrm>
+            <a:off x="9326880" y="4956048"/>
+            <a:ext cx="1828800" cy="768096"/>
+          </a:xfrm>
+          <a:prstGeom prst="rect">
+            <a:avLst/>
+          </a:prstGeom>
+          <a:noFill/>
+          <a:ln/>
+        </p:spPr>
+        <p:txBody>
+          <a:bodyPr wrap="square" rtlCol="0" anchor="ctr"/>
+          <a:lstStyle/>
+          <a:p>
+            <a:pPr indent="0" marL="0">
+              <a:buNone/>
+            </a:pPr>
+            <a:r>
+              <a:rPr lang="en-US" sz="1120" i="1" dirty="0">
+                <a:solidFill>
+                  <a:srgbClr val="6E6A63"/>
+                </a:solidFill>
+                <a:latin typeface="Calibri" pitchFamily="34" charset="0"/>
+                <a:ea typeface="Calibri" pitchFamily="34" charset="-122"/>
+                <a:cs typeface="Calibri" pitchFamily="34" charset="-120"/>
+              </a:rPr>
+              <a:t>Cualquier sala</a:t>
+            </a:r>
+            <a:endParaRPr lang="en-US" sz="1120" dirty="0"/>
+          </a:p>
+        </p:txBody>
+      </p:sp>
+      <p:sp>
+        <p:nvSpPr>
+          <p:cNvPr id="19" name="Text 17"/>
+          <p:cNvSpPr/>
+          <p:nvPr/>
+        </p:nvSpPr>
+        <p:spPr>
+          <a:xfrm>
+            <a:off x="822960" y="6080760"/>
+            <a:ext cx="10515600" cy="411480"/>
+          </a:xfrm>
+          <a:prstGeom prst="rect">
+            <a:avLst/>
+          </a:prstGeom>
+          <a:noFill/>
+          <a:ln/>
+        </p:spPr>
+        <p:txBody>
+          <a:bodyPr wrap="square" rtlCol="0" anchor="ctr"/>
+          <a:lstStyle/>
+          <a:p>
+            <a:pPr indent="0" marL="0">
+              <a:buNone/>
+            </a:pPr>
+            <a:r>
+              <a:rPr lang="en-US" sz="1350" dirty="0">
+                <a:solidFill>
+                  <a:srgbClr val="22201D"/>
+                </a:solidFill>
+                <a:latin typeface="Calibri" pitchFamily="34" charset="0"/>
+                <a:ea typeface="Calibri" pitchFamily="34" charset="-122"/>
+                <a:cs typeface="Calibri" pitchFamily="34" charset="-120"/>
+              </a:rPr>
               <a:t>Todo en abierto, bajo licencia Creative Commons Attribution 4.0: se puede copiar, adaptar y usar con cualquier finalidad, citando la autoría.</a:t>
             </a:r>
-            <a:endParaRPr lang="en-US" sz="1500" dirty="0"/>
+            <a:endParaRPr lang="en-US" sz="1350" dirty="0"/>
           </a:p>
         </p:txBody>
       </p:sp>
@@ -3274,7 +3413,7 @@
                 <a:ea typeface="Calibri" pitchFamily="34" charset="-122"/>
                 <a:cs typeface="Calibri" pitchFamily="34" charset="-120"/>
               </a:rPr>
-              <a:t>Un trabajo conjunto de varios meses entre tres personas, cada una desde su oficio, con el Ayuntamiento de Pozuelo de Alarcón como banco de pruebas real.</a:t>
+              <a:t>Un trabajo conjunto de varios meses entre cinco personas, cada una desde su oficio, con el Ayuntamiento de Pozuelo de Alarcón como banco de pruebas real.</a:t>
             </a:r>
             <a:endParaRPr lang="en-US" sz="1600" dirty="0"/>
           </a:p>
@@ -3288,8 +3427,8 @@
         </p:nvSpPr>
         <p:spPr>
           <a:xfrm>
-            <a:off x="822960" y="2057400"/>
-            <a:ext cx="82296" cy="1170432"/>
+            <a:off x="822960" y="1965960"/>
+            <a:ext cx="82296" cy="822960"/>
           </a:xfrm>
           <a:prstGeom prst="rect">
             <a:avLst/>
@@ -3308,24 +3447,24 @@
         </p:nvSpPr>
         <p:spPr>
           <a:xfrm>
-            <a:off x="1188720" y="2057400"/>
-            <a:ext cx="10058400" cy="365760"/>
-          </a:xfrm>
-          <a:prstGeom prst="rect">
-            <a:avLst/>
-          </a:prstGeom>
-          <a:noFill/>
-          <a:ln/>
-        </p:spPr>
-        <p:txBody>
-          <a:bodyPr wrap="square" rtlCol="0" anchor="ctr"/>
-          <a:lstStyle/>
-          <a:p>
-            <a:pPr indent="0" marL="0">
-              <a:buNone/>
-            </a:pPr>
-            <a:r>
-              <a:rPr lang="en-US" sz="1800" b="1" dirty="0">
+            <a:off x="1188720" y="1965960"/>
+            <a:ext cx="10058400" cy="246888"/>
+          </a:xfrm>
+          <a:prstGeom prst="rect">
+            <a:avLst/>
+          </a:prstGeom>
+          <a:noFill/>
+          <a:ln/>
+        </p:spPr>
+        <p:txBody>
+          <a:bodyPr wrap="square" rtlCol="0" anchor="ctr"/>
+          <a:lstStyle/>
+          <a:p>
+            <a:pPr indent="0" marL="0">
+              <a:buNone/>
+            </a:pPr>
+            <a:r>
+              <a:rPr lang="en-US" sz="1550" b="1" dirty="0">
                 <a:solidFill>
                   <a:srgbClr val="1F3864"/>
                 </a:solidFill>
@@ -3335,7 +3474,7 @@
               </a:rPr>
               <a:t>Delfina Lafuente Veira</a:t>
             </a:r>
-            <a:endParaRPr lang="en-US" sz="1800" dirty="0"/>
+            <a:endParaRPr lang="en-US" sz="1550" dirty="0"/>
           </a:p>
         </p:txBody>
       </p:sp>
@@ -3347,24 +3486,24 @@
         </p:nvSpPr>
         <p:spPr>
           <a:xfrm>
-            <a:off x="1188720" y="2423160"/>
-            <a:ext cx="10058400" cy="292608"/>
-          </a:xfrm>
-          <a:prstGeom prst="rect">
-            <a:avLst/>
-          </a:prstGeom>
-          <a:noFill/>
-          <a:ln/>
-        </p:spPr>
-        <p:txBody>
-          <a:bodyPr wrap="square" rtlCol="0" anchor="ctr"/>
-          <a:lstStyle/>
-          <a:p>
-            <a:pPr indent="0" marL="0">
-              <a:buNone/>
-            </a:pPr>
-            <a:r>
-              <a:rPr lang="en-US" sz="1300" dirty="0">
+            <a:off x="1188720" y="2212848"/>
+            <a:ext cx="10058400" cy="210312"/>
+          </a:xfrm>
+          <a:prstGeom prst="rect">
+            <a:avLst/>
+          </a:prstGeom>
+          <a:noFill/>
+          <a:ln/>
+        </p:spPr>
+        <p:txBody>
+          <a:bodyPr wrap="square" rtlCol="0" anchor="ctr"/>
+          <a:lstStyle/>
+          <a:p>
+            <a:pPr indent="0" marL="0">
+              <a:buNone/>
+            </a:pPr>
+            <a:r>
+              <a:rPr lang="en-US" sz="1080" dirty="0">
                 <a:solidFill>
                   <a:srgbClr val="6E6A63"/>
                 </a:solidFill>
@@ -3374,7 +3513,7 @@
               </a:rPr>
               <a:t>Concejal de Administración Digital, Calidad e Innovación · Ayuntamiento de Pozuelo de Alarcón  ·  pozuelodealarcon.org</a:t>
             </a:r>
-            <a:endParaRPr lang="en-US" sz="1300" dirty="0"/>
+            <a:endParaRPr lang="en-US" sz="1080" dirty="0"/>
           </a:p>
         </p:txBody>
       </p:sp>
@@ -3386,24 +3525,24 @@
         </p:nvSpPr>
         <p:spPr>
           <a:xfrm>
-            <a:off x="1188720" y="2734056"/>
-            <a:ext cx="10058400" cy="502920"/>
-          </a:xfrm>
-          <a:prstGeom prst="rect">
-            <a:avLst/>
-          </a:prstGeom>
-          <a:noFill/>
-          <a:ln/>
-        </p:spPr>
-        <p:txBody>
-          <a:bodyPr wrap="square" rtlCol="0" anchor="ctr"/>
-          <a:lstStyle/>
-          <a:p>
-            <a:pPr indent="0" marL="0">
-              <a:buNone/>
-            </a:pPr>
-            <a:r>
-              <a:rPr lang="en-US" sz="1350" dirty="0">
+            <a:off x="1188720" y="2423160"/>
+            <a:ext cx="10058400" cy="365760"/>
+          </a:xfrm>
+          <a:prstGeom prst="rect">
+            <a:avLst/>
+          </a:prstGeom>
+          <a:noFill/>
+          <a:ln/>
+        </p:spPr>
+        <p:txBody>
+          <a:bodyPr wrap="square" rtlCol="0" anchor="ctr"/>
+          <a:lstStyle/>
+          <a:p>
+            <a:pPr indent="0" marL="0">
+              <a:buNone/>
+            </a:pPr>
+            <a:r>
+              <a:rPr lang="en-US" sz="1140" dirty="0">
                 <a:solidFill>
                   <a:srgbClr val="22201D"/>
                 </a:solidFill>
@@ -3413,7 +3552,7 @@
               </a:rPr>
               <a:t>De ella nace el proyecto y suya es la primera redacción. Y suyo es el mérito menos visible: llevarlo a los servicios de contratación y jurídicos de su propio ayuntamiento y traer sus objeciones de vuelta enteras.</a:t>
             </a:r>
-            <a:endParaRPr lang="en-US" sz="1350" dirty="0"/>
+            <a:endParaRPr lang="en-US" sz="1140" dirty="0"/>
           </a:p>
         </p:txBody>
       </p:sp>
@@ -3425,8 +3564,8 @@
         </p:nvSpPr>
         <p:spPr>
           <a:xfrm>
-            <a:off x="822960" y="3429000"/>
-            <a:ext cx="82296" cy="1170432"/>
+            <a:off x="822960" y="2935224"/>
+            <a:ext cx="82296" cy="822960"/>
           </a:xfrm>
           <a:prstGeom prst="rect">
             <a:avLst/>
@@ -3445,24 +3584,24 @@
         </p:nvSpPr>
         <p:spPr>
           <a:xfrm>
-            <a:off x="1188720" y="3429000"/>
-            <a:ext cx="10058400" cy="365760"/>
-          </a:xfrm>
-          <a:prstGeom prst="rect">
-            <a:avLst/>
-          </a:prstGeom>
-          <a:noFill/>
-          <a:ln/>
-        </p:spPr>
-        <p:txBody>
-          <a:bodyPr wrap="square" rtlCol="0" anchor="ctr"/>
-          <a:lstStyle/>
-          <a:p>
-            <a:pPr indent="0" marL="0">
-              <a:buNone/>
-            </a:pPr>
-            <a:r>
-              <a:rPr lang="en-US" sz="1800" b="1" dirty="0">
+            <a:off x="1188720" y="2935224"/>
+            <a:ext cx="10058400" cy="246888"/>
+          </a:xfrm>
+          <a:prstGeom prst="rect">
+            <a:avLst/>
+          </a:prstGeom>
+          <a:noFill/>
+          <a:ln/>
+        </p:spPr>
+        <p:txBody>
+          <a:bodyPr wrap="square" rtlCol="0" anchor="ctr"/>
+          <a:lstStyle/>
+          <a:p>
+            <a:pPr indent="0" marL="0">
+              <a:buNone/>
+            </a:pPr>
+            <a:r>
+              <a:rPr lang="en-US" sz="1550" b="1" dirty="0">
                 <a:solidFill>
                   <a:srgbClr val="1F3864"/>
                 </a:solidFill>
@@ -3472,7 +3611,7 @@
               </a:rPr>
               <a:t>Dr. José Antonio Ondiviela García</a:t>
             </a:r>
-            <a:endParaRPr lang="en-US" sz="1800" dirty="0"/>
+            <a:endParaRPr lang="en-US" sz="1550" dirty="0"/>
           </a:p>
         </p:txBody>
       </p:sp>
@@ -3484,24 +3623,24 @@
         </p:nvSpPr>
         <p:spPr>
           <a:xfrm>
-            <a:off x="1188720" y="3794760"/>
-            <a:ext cx="10058400" cy="292608"/>
-          </a:xfrm>
-          <a:prstGeom prst="rect">
-            <a:avLst/>
-          </a:prstGeom>
-          <a:noFill/>
-          <a:ln/>
-        </p:spPr>
-        <p:txBody>
-          <a:bodyPr wrap="square" rtlCol="0" anchor="ctr"/>
-          <a:lstStyle/>
-          <a:p>
-            <a:pPr indent="0" marL="0">
-              <a:buNone/>
-            </a:pPr>
-            <a:r>
-              <a:rPr lang="en-US" sz="1300" dirty="0">
+            <a:off x="1188720" y="3182112"/>
+            <a:ext cx="10058400" cy="210312"/>
+          </a:xfrm>
+          <a:prstGeom prst="rect">
+            <a:avLst/>
+          </a:prstGeom>
+          <a:noFill/>
+          <a:ln/>
+        </p:spPr>
+        <p:txBody>
+          <a:bodyPr wrap="square" rtlCol="0" anchor="ctr"/>
+          <a:lstStyle/>
+          <a:p>
+            <a:pPr indent="0" marL="0">
+              <a:buNone/>
+            </a:pPr>
+            <a:r>
+              <a:rPr lang="en-US" sz="1080" dirty="0">
                 <a:solidFill>
                   <a:srgbClr val="6E6A63"/>
                 </a:solidFill>
@@ -3511,7 +3650,7 @@
               </a:rPr>
               <a:t>Profesor e investigador de la Escuela Politécnica Superior · Universidad Francisco de Vitoria  ·  ufv.es</a:t>
             </a:r>
-            <a:endParaRPr lang="en-US" sz="1300" dirty="0"/>
+            <a:endParaRPr lang="en-US" sz="1080" dirty="0"/>
           </a:p>
         </p:txBody>
       </p:sp>
@@ -3523,24 +3662,24 @@
         </p:nvSpPr>
         <p:spPr>
           <a:xfrm>
-            <a:off x="1188720" y="4105656"/>
-            <a:ext cx="10058400" cy="502920"/>
-          </a:xfrm>
-          <a:prstGeom prst="rect">
-            <a:avLst/>
-          </a:prstGeom>
-          <a:noFill/>
-          <a:ln/>
-        </p:spPr>
-        <p:txBody>
-          <a:bodyPr wrap="square" rtlCol="0" anchor="ctr"/>
-          <a:lstStyle/>
-          <a:p>
-            <a:pPr indent="0" marL="0">
-              <a:buNone/>
-            </a:pPr>
-            <a:r>
-              <a:rPr lang="en-US" sz="1350" dirty="0">
+            <a:off x="1188720" y="3392424"/>
+            <a:ext cx="10058400" cy="365760"/>
+          </a:xfrm>
+          <a:prstGeom prst="rect">
+            <a:avLst/>
+          </a:prstGeom>
+          <a:noFill/>
+          <a:ln/>
+        </p:spPr>
+        <p:txBody>
+          <a:bodyPr wrap="square" rtlCol="0" anchor="ctr"/>
+          <a:lstStyle/>
+          <a:p>
+            <a:pPr indent="0" marL="0">
+              <a:buNone/>
+            </a:pPr>
+            <a:r>
+              <a:rPr lang="en-US" sz="1140" dirty="0">
                 <a:solidFill>
                   <a:srgbClr val="22201D"/>
                 </a:solidFill>
@@ -3550,7 +3689,7 @@
               </a:rPr>
               <a:t>La mirada del mercado: qué se le puede pedir de verdad a un fabricante de software y qué hará que no se presente. Suya es la idea que resuelve el problema de fondo.</a:t>
             </a:r>
-            <a:endParaRPr lang="en-US" sz="1350" dirty="0"/>
+            <a:endParaRPr lang="en-US" sz="1140" dirty="0"/>
           </a:p>
         </p:txBody>
       </p:sp>
@@ -3562,8 +3701,8 @@
         </p:nvSpPr>
         <p:spPr>
           <a:xfrm>
-            <a:off x="822960" y="4800600"/>
-            <a:ext cx="82296" cy="1170432"/>
+            <a:off x="822960" y="3904488"/>
+            <a:ext cx="82296" cy="822960"/>
           </a:xfrm>
           <a:prstGeom prst="rect">
             <a:avLst/>
@@ -3582,24 +3721,24 @@
         </p:nvSpPr>
         <p:spPr>
           <a:xfrm>
-            <a:off x="1188720" y="4800600"/>
-            <a:ext cx="10058400" cy="365760"/>
-          </a:xfrm>
-          <a:prstGeom prst="rect">
-            <a:avLst/>
-          </a:prstGeom>
-          <a:noFill/>
-          <a:ln/>
-        </p:spPr>
-        <p:txBody>
-          <a:bodyPr wrap="square" rtlCol="0" anchor="ctr"/>
-          <a:lstStyle/>
-          <a:p>
-            <a:pPr indent="0" marL="0">
-              <a:buNone/>
-            </a:pPr>
-            <a:r>
-              <a:rPr lang="en-US" sz="1800" b="1" dirty="0">
+            <a:off x="1188720" y="3904488"/>
+            <a:ext cx="10058400" cy="246888"/>
+          </a:xfrm>
+          <a:prstGeom prst="rect">
+            <a:avLst/>
+          </a:prstGeom>
+          <a:noFill/>
+          <a:ln/>
+        </p:spPr>
+        <p:txBody>
+          <a:bodyPr wrap="square" rtlCol="0" anchor="ctr"/>
+          <a:lstStyle/>
+          <a:p>
+            <a:pPr indent="0" marL="0">
+              <a:buNone/>
+            </a:pPr>
+            <a:r>
+              <a:rPr lang="en-US" sz="1550" b="1" dirty="0">
                 <a:solidFill>
                   <a:srgbClr val="1F3864"/>
                 </a:solidFill>
@@ -3609,7 +3748,7 @@
               </a:rPr>
               <a:t>Miguel Ángel Domínguez Castellano</a:t>
             </a:r>
-            <a:endParaRPr lang="en-US" sz="1800" dirty="0"/>
+            <a:endParaRPr lang="en-US" sz="1550" dirty="0"/>
           </a:p>
         </p:txBody>
       </p:sp>
@@ -3621,24 +3760,24 @@
         </p:nvSpPr>
         <p:spPr>
           <a:xfrm>
-            <a:off x="1188720" y="5166360"/>
-            <a:ext cx="10058400" cy="292608"/>
-          </a:xfrm>
-          <a:prstGeom prst="rect">
-            <a:avLst/>
-          </a:prstGeom>
-          <a:noFill/>
-          <a:ln/>
-        </p:spPr>
-        <p:txBody>
-          <a:bodyPr wrap="square" rtlCol="0" anchor="ctr"/>
-          <a:lstStyle/>
-          <a:p>
-            <a:pPr indent="0" marL="0">
-              <a:buNone/>
-            </a:pPr>
-            <a:r>
-              <a:rPr lang="en-US" sz="1300" dirty="0">
+            <a:off x="1188720" y="4151376"/>
+            <a:ext cx="10058400" cy="210312"/>
+          </a:xfrm>
+          <a:prstGeom prst="rect">
+            <a:avLst/>
+          </a:prstGeom>
+          <a:noFill/>
+          <a:ln/>
+        </p:spPr>
+        <p:txBody>
+          <a:bodyPr wrap="square" rtlCol="0" anchor="ctr"/>
+          <a:lstStyle/>
+          <a:p>
+            <a:pPr indent="0" marL="0">
+              <a:buNone/>
+            </a:pPr>
+            <a:r>
+              <a:rPr lang="en-US" sz="1080" dirty="0">
                 <a:solidFill>
                   <a:srgbClr val="6E6A63"/>
                 </a:solidFill>
@@ -3648,7 +3787,7 @@
               </a:rPr>
               <a:t>CEO de Add4u · Presidente de Alastria · Presidente del Clúster de Blockchain de la Comunidad de Madrid  ·  miguelangeldominguez.info</a:t>
             </a:r>
-            <a:endParaRPr lang="en-US" sz="1300" dirty="0"/>
+            <a:endParaRPr lang="en-US" sz="1080" dirty="0"/>
           </a:p>
         </p:txBody>
       </p:sp>
@@ -3660,24 +3799,24 @@
         </p:nvSpPr>
         <p:spPr>
           <a:xfrm>
-            <a:off x="1188720" y="5477256"/>
-            <a:ext cx="10058400" cy="502920"/>
-          </a:xfrm>
-          <a:prstGeom prst="rect">
-            <a:avLst/>
-          </a:prstGeom>
-          <a:noFill/>
-          <a:ln/>
-        </p:spPr>
-        <p:txBody>
-          <a:bodyPr wrap="square" rtlCol="0" anchor="ctr"/>
-          <a:lstStyle/>
-          <a:p>
-            <a:pPr indent="0" marL="0">
-              <a:buNone/>
-            </a:pPr>
-            <a:r>
-              <a:rPr lang="en-US" sz="1350" dirty="0">
+            <a:off x="1188720" y="4361688"/>
+            <a:ext cx="10058400" cy="365760"/>
+          </a:xfrm>
+          <a:prstGeom prst="rect">
+            <a:avLst/>
+          </a:prstGeom>
+          <a:noFill/>
+          <a:ln/>
+        </p:spPr>
+        <p:txBody>
+          <a:bodyPr wrap="square" rtlCol="0" anchor="ctr"/>
+          <a:lstStyle/>
+          <a:p>
+            <a:pPr indent="0" marL="0">
+              <a:buNone/>
+            </a:pPr>
+            <a:r>
+              <a:rPr lang="en-US" sz="1140" dirty="0">
                 <a:solidFill>
                   <a:srgbClr val="22201D"/>
                 </a:solidFill>
@@ -3687,36 +3826,95 @@
               </a:rPr>
               <a:t>La perspectiva de quien conoce las dos orillas: la de quien redacta pliegos y la de quien se presenta a ellos. Asume la responsabilidad editorial de la publicación.</a:t>
             </a:r>
-            <a:endParaRPr lang="en-US" sz="1350" dirty="0"/>
-          </a:p>
-        </p:txBody>
-      </p:sp>
-      <p:sp>
-        <p:nvSpPr>
-          <p:cNvPr id="16" name="Text 14"/>
-          <p:cNvSpPr/>
-          <p:nvPr/>
-        </p:nvSpPr>
-        <p:spPr>
-          <a:xfrm>
-            <a:off x="822960" y="5806440"/>
-            <a:ext cx="10515600" cy="731520"/>
-          </a:xfrm>
-          <a:prstGeom prst="rect">
-            <a:avLst/>
-          </a:prstGeom>
-          <a:noFill/>
-          <a:ln/>
-        </p:spPr>
-        <p:txBody>
-          <a:bodyPr wrap="square" rtlCol="0" anchor="ctr"/>
-          <a:lstStyle/>
-          <a:p>
-            <a:pPr indent="0" marL="0">
-              <a:buNone/>
-            </a:pPr>
-            <a:r>
-              <a:rPr lang="en-US" sz="1350" i="1" dirty="0">
+            <a:endParaRPr lang="en-US" sz="1140" dirty="0"/>
+          </a:p>
+        </p:txBody>
+      </p:sp>
+      <p:sp>
+        <p:nvSpPr>
+          <p:cNvPr id="16" name="Shape 14"/>
+          <p:cNvSpPr/>
+          <p:nvPr/>
+        </p:nvSpPr>
+        <p:spPr>
+          <a:xfrm>
+            <a:off x="822960" y="4873752"/>
+            <a:ext cx="82296" cy="822960"/>
+          </a:xfrm>
+          <a:prstGeom prst="rect">
+            <a:avLst/>
+          </a:prstGeom>
+          <a:solidFill>
+            <a:srgbClr val="1F3864"/>
+          </a:solidFill>
+          <a:ln/>
+        </p:spPr>
+      </p:sp>
+      <p:sp>
+        <p:nvSpPr>
+          <p:cNvPr id="17" name="Text 15"/>
+          <p:cNvSpPr/>
+          <p:nvPr/>
+        </p:nvSpPr>
+        <p:spPr>
+          <a:xfrm>
+            <a:off x="1188720" y="4873752"/>
+            <a:ext cx="10058400" cy="246888"/>
+          </a:xfrm>
+          <a:prstGeom prst="rect">
+            <a:avLst/>
+          </a:prstGeom>
+          <a:noFill/>
+          <a:ln/>
+        </p:spPr>
+        <p:txBody>
+          <a:bodyPr wrap="square" rtlCol="0" anchor="ctr"/>
+          <a:lstStyle/>
+          <a:p>
+            <a:pPr indent="0" marL="0">
+              <a:buNone/>
+            </a:pPr>
+            <a:r>
+              <a:rPr lang="en-US" sz="1550" b="1" dirty="0">
+                <a:solidFill>
+                  <a:srgbClr val="1F3864"/>
+                </a:solidFill>
+                <a:latin typeface="Georgia" pitchFamily="34" charset="0"/>
+                <a:ea typeface="Georgia" pitchFamily="34" charset="-122"/>
+                <a:cs typeface="Georgia" pitchFamily="34" charset="-120"/>
+              </a:rPr>
+              <a:t>Enrique Jiménez y Roberto García</a:t>
+            </a:r>
+            <a:endParaRPr lang="en-US" sz="1550" dirty="0"/>
+          </a:p>
+        </p:txBody>
+      </p:sp>
+      <p:sp>
+        <p:nvSpPr>
+          <p:cNvPr id="18" name="Text 16"/>
+          <p:cNvSpPr/>
+          <p:nvPr/>
+        </p:nvSpPr>
+        <p:spPr>
+          <a:xfrm>
+            <a:off x="1188720" y="5120640"/>
+            <a:ext cx="10058400" cy="210312"/>
+          </a:xfrm>
+          <a:prstGeom prst="rect">
+            <a:avLst/>
+          </a:prstGeom>
+          <a:noFill/>
+          <a:ln/>
+        </p:spPr>
+        <p:txBody>
+          <a:bodyPr wrap="square" rtlCol="0" anchor="ctr"/>
+          <a:lstStyle/>
+          <a:p>
+            <a:pPr indent="0" marL="0">
+              <a:buNone/>
+            </a:pPr>
+            <a:r>
+              <a:rPr lang="en-US" sz="1080" dirty="0">
                 <a:solidFill>
                   <a:srgbClr val="6E6A63"/>
                 </a:solidFill>
@@ -3724,9 +3922,87 @@
                 <a:ea typeface="Calibri" pitchFamily="34" charset="-122"/>
                 <a:cs typeface="Calibri" pitchFamily="34" charset="-120"/>
               </a:rPr>
-              <a:t>El área de contratación del Ayuntamiento de Pozuelo de Alarcón no figura como autora y sin embargo ha determinado la forma del documento más que ninguna otra aportación: sus tres objeciones son la razón de ser de esta versión.</a:t>
-            </a:r>
-            <a:endParaRPr lang="en-US" sz="1350" dirty="0"/>
+              <a:t>Técnicos del área de contratación · Ayuntamiento de Pozuelo de Alarcón</a:t>
+            </a:r>
+            <a:endParaRPr lang="en-US" sz="1080" dirty="0"/>
+          </a:p>
+        </p:txBody>
+      </p:sp>
+      <p:sp>
+        <p:nvSpPr>
+          <p:cNvPr id="19" name="Text 17"/>
+          <p:cNvSpPr/>
+          <p:nvPr/>
+        </p:nvSpPr>
+        <p:spPr>
+          <a:xfrm>
+            <a:off x="1188720" y="5330952"/>
+            <a:ext cx="10058400" cy="365760"/>
+          </a:xfrm>
+          <a:prstGeom prst="rect">
+            <a:avLst/>
+          </a:prstGeom>
+          <a:noFill/>
+          <a:ln/>
+        </p:spPr>
+        <p:txBody>
+          <a:bodyPr wrap="square" rtlCol="0" anchor="ctr"/>
+          <a:lstStyle/>
+          <a:p>
+            <a:pPr indent="0" marL="0">
+              <a:buNone/>
+            </a:pPr>
+            <a:r>
+              <a:rPr lang="en-US" sz="1140" dirty="0">
+                <a:solidFill>
+                  <a:srgbClr val="22201D"/>
+                </a:solidFill>
+                <a:latin typeface="Calibri" pitchFamily="34" charset="0"/>
+                <a:ea typeface="Calibri" pitchFamily="34" charset="-122"/>
+                <a:cs typeface="Calibri" pitchFamily="34" charset="-120"/>
+              </a:rPr>
+              <a:t>Autores y supervisores técnicos: han aportado el contraste de la práctica municipal y la supervisión técnica de la formulación contractual.</a:t>
+            </a:r>
+            <a:endParaRPr lang="en-US" sz="1140" dirty="0"/>
+          </a:p>
+        </p:txBody>
+      </p:sp>
+      <p:sp>
+        <p:nvSpPr>
+          <p:cNvPr id="20" name="Text 18"/>
+          <p:cNvSpPr/>
+          <p:nvPr/>
+        </p:nvSpPr>
+        <p:spPr>
+          <a:xfrm>
+            <a:off x="822960" y="5989320"/>
+            <a:ext cx="10515600" cy="411480"/>
+          </a:xfrm>
+          <a:prstGeom prst="rect">
+            <a:avLst/>
+          </a:prstGeom>
+          <a:noFill/>
+          <a:ln/>
+        </p:spPr>
+        <p:txBody>
+          <a:bodyPr wrap="square" rtlCol="0" anchor="ctr"/>
+          <a:lstStyle/>
+          <a:p>
+            <a:pPr indent="0" marL="0">
+              <a:buNone/>
+            </a:pPr>
+            <a:r>
+              <a:rPr lang="en-US" sz="1180" i="1" dirty="0">
+                <a:solidFill>
+                  <a:srgbClr val="6E6A63"/>
+                </a:solidFill>
+                <a:latin typeface="Calibri" pitchFamily="34" charset="0"/>
+                <a:ea typeface="Calibri" pitchFamily="34" charset="-122"/>
+                <a:cs typeface="Calibri" pitchFamily="34" charset="-120"/>
+              </a:rPr>
+              <a:t>Las tres objeciones formuladas desde el área de contratación son la razón de ser de esta versión y están respondidas en el cuerpo del documento.</a:t>
+            </a:r>
+            <a:endParaRPr lang="en-US" sz="1180" dirty="0"/>
           </a:p>
         </p:txBody>
       </p:sp>

--- a/docs/descargas/presentacion-ai-clauses.pptx
+++ b/docs/descargas/presentacion-ai-clauses.pptx
@@ -2468,7 +2468,7 @@
                 <a:ea typeface="Calibri" pitchFamily="34" charset="-122"/>
                 <a:cs typeface="Calibri" pitchFamily="34" charset="-120"/>
               </a:rPr>
-              <a:t>Un caso piloto resuelto de principio a fin.</a:t>
+              <a:t>Un ejemplo completo trabajado, de principio a fin, sobre un expediente simulado.</a:t>
             </a:r>
             <a:endParaRPr lang="en-US" sz="1600" dirty="0"/>
           </a:p>
@@ -2808,7 +2808,7 @@
                 <a:ea typeface="Calibri" pitchFamily="34" charset="-122"/>
                 <a:cs typeface="Calibri" pitchFamily="34" charset="-120"/>
               </a:rPr>
-              <a:t>Catálogo, memoria justificativa para la Intervención, circuito del expediente, caso piloto y anexos con todos los modelos.</a:t>
+              <a:t>Catálogo, memoria justificativa para los órganos de control, circuito del expediente, ejemplo trabajado y anexos con todos los modelos.</a:t>
             </a:r>
             <a:endParaRPr lang="en-US" sz="1280" dirty="0"/>
           </a:p>
@@ -3922,7 +3922,7 @@
                 <a:ea typeface="Calibri" pitchFamily="34" charset="-122"/>
                 <a:cs typeface="Calibri" pitchFamily="34" charset="-120"/>
               </a:rPr>
-              <a:t>Técnicos del área de contratación · Ayuntamiento de Pozuelo de Alarcón</a:t>
+              <a:t>Responsable de los contratos de innovación · Jefe de informática — Ayuntamiento de Pozuelo de Alarcón</a:t>
             </a:r>
             <a:endParaRPr lang="en-US" sz="1080" dirty="0"/>
           </a:p>
@@ -3975,24 +3975,24 @@
         </p:nvSpPr>
         <p:spPr>
           <a:xfrm>
-            <a:off x="822960" y="5989320"/>
-            <a:ext cx="10515600" cy="411480"/>
-          </a:xfrm>
-          <a:prstGeom prst="rect">
-            <a:avLst/>
-          </a:prstGeom>
-          <a:noFill/>
-          <a:ln/>
-        </p:spPr>
-        <p:txBody>
-          <a:bodyPr wrap="square" rtlCol="0" anchor="ctr"/>
-          <a:lstStyle/>
-          <a:p>
-            <a:pPr indent="0" marL="0">
-              <a:buNone/>
-            </a:pPr>
-            <a:r>
-              <a:rPr lang="en-US" sz="1180" i="1" dirty="0">
+            <a:off x="822960" y="5943600"/>
+            <a:ext cx="10515600" cy="548640"/>
+          </a:xfrm>
+          <a:prstGeom prst="rect">
+            <a:avLst/>
+          </a:prstGeom>
+          <a:noFill/>
+          <a:ln/>
+        </p:spPr>
+        <p:txBody>
+          <a:bodyPr wrap="square" rtlCol="0" anchor="ctr"/>
+          <a:lstStyle/>
+          <a:p>
+            <a:pPr indent="0" marL="0">
+              <a:buNone/>
+            </a:pPr>
+            <a:r>
+              <a:rPr lang="en-US" sz="1100" i="1" dirty="0">
                 <a:solidFill>
                   <a:srgbClr val="6E6A63"/>
                 </a:solidFill>
@@ -4000,9 +4000,9 @@
                 <a:ea typeface="Calibri" pitchFamily="34" charset="-122"/>
                 <a:cs typeface="Calibri" pitchFamily="34" charset="-120"/>
               </a:rPr>
-              <a:t>Las tres objeciones formuladas desde el área de contratación son la razón de ser de esta versión y están respondidas en el cuerpo del documento.</a:t>
-            </a:r>
-            <a:endParaRPr lang="en-US" sz="1180" dirty="0"/>
+              <a:t>La objeción interna de junio de 2026, con sus cuatro reproches, es la razón de ser de esta versión y está citada y respondida en el cuerpo del documento. Ningún órgano de contratación, intervención o asesoría jurídica se ha pronunciado sobre el catálogo.</a:t>
+            </a:r>
+            <a:endParaRPr lang="en-US" sz="1100" dirty="0"/>
           </a:p>
         </p:txBody>
       </p:sp>
@@ -7800,7 +7800,7 @@
                 <a:ea typeface="Georgia" pitchFamily="34" charset="-122"/>
                 <a:cs typeface="Georgia" pitchFamily="34" charset="-120"/>
               </a:rPr>
-              <a:t>De dónde sale: un ayuntamiento y tres objeciones</a:t>
+              <a:t>De dónde sale: un problema real y cuatro objeciones</a:t>
             </a:r>
             <a:endParaRPr lang="en-US" sz="3600" dirty="0"/>
           </a:p>
@@ -7839,7 +7839,7 @@
                 <a:ea typeface="Calibri" pitchFamily="34" charset="-122"/>
                 <a:cs typeface="Calibri" pitchFamily="34" charset="-120"/>
               </a:rPr>
-              <a:t>El clausulado nació en el Ayuntamiento de Pozuelo de Alarcón en 2026 y se sometió al criterio de su área de contratación. Lo que esa área respondió es lo que da forma a esta versión.</a:t>
+              <a:t>El clausulado nació en el Ayuntamiento de Pozuelo de Alarcón en 2026 y se sometió por escrito a la crítica de quien tendría que aplicarlo. Lo que esa crítica dijo es lo que da forma a esta versión.</a:t>
             </a:r>
             <a:endParaRPr lang="en-US" sz="1750" dirty="0"/>
           </a:p>
@@ -7853,12 +7853,12 @@
         </p:nvSpPr>
         <p:spPr>
           <a:xfrm>
-            <a:off x="822960" y="2377440"/>
-            <a:ext cx="10515600" cy="1051560"/>
+            <a:off x="822960" y="2240280"/>
+            <a:ext cx="10515600" cy="841248"/>
           </a:xfrm>
           <a:prstGeom prst="roundRect">
             <a:avLst>
-              <a:gd name="adj" fmla="val 8696"/>
+              <a:gd name="adj" fmla="val 10870"/>
             </a:avLst>
           </a:prstGeom>
           <a:solidFill>
@@ -7875,24 +7875,24 @@
         </p:nvSpPr>
         <p:spPr>
           <a:xfrm>
-            <a:off x="1051560" y="2468880"/>
-            <a:ext cx="2743200" cy="868680"/>
-          </a:xfrm>
-          <a:prstGeom prst="rect">
-            <a:avLst/>
-          </a:prstGeom>
-          <a:noFill/>
-          <a:ln/>
-        </p:spPr>
-        <p:txBody>
-          <a:bodyPr wrap="square" rtlCol="0" anchor="ctr"/>
-          <a:lstStyle/>
-          <a:p>
-            <a:pPr indent="0" marL="0">
-              <a:buNone/>
-            </a:pPr>
-            <a:r>
-              <a:rPr lang="en-US" sz="1700" b="1" dirty="0">
+            <a:off x="1051560" y="2295144"/>
+            <a:ext cx="2834640" cy="731520"/>
+          </a:xfrm>
+          <a:prstGeom prst="rect">
+            <a:avLst/>
+          </a:prstGeom>
+          <a:noFill/>
+          <a:ln/>
+        </p:spPr>
+        <p:txBody>
+          <a:bodyPr wrap="square" rtlCol="0" anchor="ctr"/>
+          <a:lstStyle/>
+          <a:p>
+            <a:pPr indent="0" marL="0">
+              <a:buNone/>
+            </a:pPr>
+            <a:r>
+              <a:rPr lang="en-US" sz="1450" b="1" dirty="0">
                 <a:solidFill>
                   <a:srgbClr val="1F3864"/>
                 </a:solidFill>
@@ -7902,7 +7902,7 @@
               </a:rPr>
               <a:t>«Artificioso al contrato»</a:t>
             </a:r>
-            <a:endParaRPr lang="en-US" sz="1700" dirty="0"/>
+            <a:endParaRPr lang="en-US" sz="1450" dirty="0"/>
           </a:p>
         </p:txBody>
       </p:sp>
@@ -7914,24 +7914,24 @@
         </p:nvSpPr>
         <p:spPr>
           <a:xfrm>
-            <a:off x="3931920" y="2468880"/>
-            <a:ext cx="7223760" cy="868680"/>
-          </a:xfrm>
-          <a:prstGeom prst="rect">
-            <a:avLst/>
-          </a:prstGeom>
-          <a:noFill/>
-          <a:ln/>
-        </p:spPr>
-        <p:txBody>
-          <a:bodyPr wrap="square" rtlCol="0" anchor="ctr"/>
-          <a:lstStyle/>
-          <a:p>
-            <a:pPr indent="0" marL="0">
-              <a:buNone/>
-            </a:pPr>
-            <a:r>
-              <a:rPr lang="en-US" sz="1450" dirty="0">
+            <a:off x="4023360" y="2295144"/>
+            <a:ext cx="7132320" cy="731520"/>
+          </a:xfrm>
+          <a:prstGeom prst="rect">
+            <a:avLst/>
+          </a:prstGeom>
+          <a:noFill/>
+          <a:ln/>
+        </p:spPr>
+        <p:txBody>
+          <a:bodyPr wrap="square" rtlCol="0" anchor="ctr"/>
+          <a:lstStyle/>
+          <a:p>
+            <a:pPr indent="0" marL="0">
+              <a:buNone/>
+            </a:pPr>
+            <a:r>
+              <a:rPr lang="en-US" sz="1200" dirty="0">
                 <a:solidFill>
                   <a:srgbClr val="22201D"/>
                 </a:solidFill>
@@ -7939,9 +7939,9 @@
                 <a:ea typeface="Calibri" pitchFamily="34" charset="-122"/>
                 <a:cs typeface="Calibri" pitchFamily="34" charset="-120"/>
               </a:rPr>
-              <a:t>Cada cláusula lleva ahora el origen de su necesidad: una norma, el servicio gestor, o un acuerdo del órgano de gobierno. Lo que no tiene ninguno de los tres, no entra.</a:t>
-            </a:r>
-            <a:endParaRPr lang="en-US" sz="1450" dirty="0"/>
+              <a:t>Cada cláusula lleva el origen de su necesidad: una norma, el servicio gestor, o un acuerdo del órgano de gobierno. Lo que no tiene ninguno de los tres, no entra.</a:t>
+            </a:r>
+            <a:endParaRPr lang="en-US" sz="1200" dirty="0"/>
           </a:p>
         </p:txBody>
       </p:sp>
@@ -7953,12 +7953,12 @@
         </p:nvSpPr>
         <p:spPr>
           <a:xfrm>
-            <a:off x="822960" y="3611880"/>
-            <a:ext cx="10515600" cy="1051560"/>
+            <a:off x="822960" y="3172968"/>
+            <a:ext cx="10515600" cy="841248"/>
           </a:xfrm>
           <a:prstGeom prst="roundRect">
             <a:avLst>
-              <a:gd name="adj" fmla="val 8696"/>
+              <a:gd name="adj" fmla="val 10870"/>
             </a:avLst>
           </a:prstGeom>
           <a:solidFill>
@@ -7975,24 +7975,24 @@
         </p:nvSpPr>
         <p:spPr>
           <a:xfrm>
-            <a:off x="1051560" y="3703320"/>
-            <a:ext cx="2743200" cy="868680"/>
-          </a:xfrm>
-          <a:prstGeom prst="rect">
-            <a:avLst/>
-          </a:prstGeom>
-          <a:noFill/>
-          <a:ln/>
-        </p:spPr>
-        <p:txBody>
-          <a:bodyPr wrap="square" rtlCol="0" anchor="ctr"/>
-          <a:lstStyle/>
-          <a:p>
-            <a:pPr indent="0" marL="0">
-              <a:buNone/>
-            </a:pPr>
-            <a:r>
-              <a:rPr lang="en-US" sz="1700" b="1" dirty="0">
+            <a:off x="1051560" y="3227832"/>
+            <a:ext cx="2834640" cy="731520"/>
+          </a:xfrm>
+          <a:prstGeom prst="rect">
+            <a:avLst/>
+          </a:prstGeom>
+          <a:noFill/>
+          <a:ln/>
+        </p:spPr>
+        <p:txBody>
+          <a:bodyPr wrap="square" rtlCol="0" anchor="ctr"/>
+          <a:lstStyle/>
+          <a:p>
+            <a:pPr indent="0" marL="0">
+              <a:buNone/>
+            </a:pPr>
+            <a:r>
+              <a:rPr lang="en-US" sz="1450" b="1" dirty="0">
                 <a:solidFill>
                   <a:srgbClr val="1F3864"/>
                 </a:solidFill>
@@ -8000,9 +8000,9 @@
                 <a:ea typeface="Georgia" pitchFamily="34" charset="-122"/>
                 <a:cs typeface="Georgia" pitchFamily="34" charset="-120"/>
               </a:rPr>
-              <a:t>«Demasiado abstracto»</a:t>
-            </a:r>
-            <a:endParaRPr lang="en-US" sz="1700" dirty="0"/>
+              <a:t>«El seguimiento real es escaso»</a:t>
+            </a:r>
+            <a:endParaRPr lang="en-US" sz="1450" dirty="0"/>
           </a:p>
         </p:txBody>
       </p:sp>
@@ -8014,24 +8014,24 @@
         </p:nvSpPr>
         <p:spPr>
           <a:xfrm>
-            <a:off x="3931920" y="3703320"/>
-            <a:ext cx="7223760" cy="868680"/>
-          </a:xfrm>
-          <a:prstGeom prst="rect">
-            <a:avLst/>
-          </a:prstGeom>
-          <a:noFill/>
-          <a:ln/>
-        </p:spPr>
-        <p:txBody>
-          <a:bodyPr wrap="square" rtlCol="0" anchor="ctr"/>
-          <a:lstStyle/>
-          <a:p>
-            <a:pPr indent="0" marL="0">
-              <a:buNone/>
-            </a:pPr>
-            <a:r>
-              <a:rPr lang="en-US" sz="1450" dirty="0">
+            <a:off x="4023360" y="3227832"/>
+            <a:ext cx="7132320" cy="731520"/>
+          </a:xfrm>
+          <a:prstGeom prst="rect">
+            <a:avLst/>
+          </a:prstGeom>
+          <a:noFill/>
+          <a:ln/>
+        </p:spPr>
+        <p:txBody>
+          <a:bodyPr wrap="square" rtlCol="0" anchor="ctr"/>
+          <a:lstStyle/>
+          <a:p>
+            <a:pPr indent="0" marL="0">
+              <a:buNone/>
+            </a:pPr>
+            <a:r>
+              <a:rPr lang="en-US" sz="1200" dirty="0">
                 <a:solidFill>
                   <a:srgbClr val="22201D"/>
                 </a:solidFill>
@@ -8039,9 +8039,9 @@
                 <a:ea typeface="Calibri" pitchFamily="34" charset="-122"/>
                 <a:cs typeface="Calibri" pitchFamily="34" charset="-120"/>
               </a:rPr>
-              <a:t>Cada cláusula tiene siete epígrafes fijos, y el texto que se copia va dentro de un recuadro. Fuera del recuadro no se copia nada.</a:t>
-            </a:r>
-            <a:endParaRPr lang="en-US" sz="1450" dirty="0"/>
+              <a:t>Quien controla no puede imponer instrumentos, pero sí necesita el dato al mismo rango que quien gestiona. De ahí ADM-12: sin tarificar, en formato abierto y con diccionario de datos.</a:t>
+            </a:r>
+            <a:endParaRPr lang="en-US" sz="1200" dirty="0"/>
           </a:p>
         </p:txBody>
       </p:sp>
@@ -8053,12 +8053,12 @@
         </p:nvSpPr>
         <p:spPr>
           <a:xfrm>
-            <a:off x="822960" y="4846320"/>
-            <a:ext cx="10515600" cy="1051560"/>
+            <a:off x="822960" y="4105656"/>
+            <a:ext cx="10515600" cy="841248"/>
           </a:xfrm>
           <a:prstGeom prst="roundRect">
             <a:avLst>
-              <a:gd name="adj" fmla="val 8696"/>
+              <a:gd name="adj" fmla="val 10870"/>
             </a:avLst>
           </a:prstGeom>
           <a:solidFill>
@@ -8075,24 +8075,24 @@
         </p:nvSpPr>
         <p:spPr>
           <a:xfrm>
-            <a:off x="1051560" y="4937760"/>
-            <a:ext cx="2743200" cy="868680"/>
-          </a:xfrm>
-          <a:prstGeom prst="rect">
-            <a:avLst/>
-          </a:prstGeom>
-          <a:noFill/>
-          <a:ln/>
-        </p:spPr>
-        <p:txBody>
-          <a:bodyPr wrap="square" rtlCol="0" anchor="ctr"/>
-          <a:lstStyle/>
-          <a:p>
-            <a:pPr indent="0" marL="0">
-              <a:buNone/>
-            </a:pPr>
-            <a:r>
-              <a:rPr lang="en-US" sz="1700" b="1" dirty="0">
+            <a:off x="1051560" y="4160520"/>
+            <a:ext cx="2834640" cy="731520"/>
+          </a:xfrm>
+          <a:prstGeom prst="rect">
+            <a:avLst/>
+          </a:prstGeom>
+          <a:noFill/>
+          <a:ln/>
+        </p:spPr>
+        <p:txBody>
+          <a:bodyPr wrap="square" rtlCol="0" anchor="ctr"/>
+          <a:lstStyle/>
+          <a:p>
+            <a:pPr indent="0" marL="0">
+              <a:buNone/>
+            </a:pPr>
+            <a:r>
+              <a:rPr lang="en-US" sz="1450" b="1" dirty="0">
                 <a:solidFill>
                   <a:srgbClr val="1F3864"/>
                 </a:solidFill>
@@ -8100,9 +8100,9 @@
                 <a:ea typeface="Georgia" pitchFamily="34" charset="-122"/>
                 <a:cs typeface="Georgia" pitchFamily="34" charset="-120"/>
               </a:rPr>
-              <a:t>«Pruébalo primero»</a:t>
-            </a:r>
-            <a:endParaRPr lang="en-US" sz="1700" dirty="0"/>
+              <a:t>«Demasiado abstracto»</a:t>
+            </a:r>
+            <a:endParaRPr lang="en-US" sz="1450" dirty="0"/>
           </a:p>
         </p:txBody>
       </p:sp>
@@ -8114,24 +8114,24 @@
         </p:nvSpPr>
         <p:spPr>
           <a:xfrm>
-            <a:off x="3931920" y="4937760"/>
-            <a:ext cx="7223760" cy="868680"/>
-          </a:xfrm>
-          <a:prstGeom prst="rect">
-            <a:avLst/>
-          </a:prstGeom>
-          <a:noFill/>
-          <a:ln/>
-        </p:spPr>
-        <p:txBody>
-          <a:bodyPr wrap="square" rtlCol="0" anchor="ctr"/>
-          <a:lstStyle/>
-          <a:p>
-            <a:pPr indent="0" marL="0">
-              <a:buNone/>
-            </a:pPr>
-            <a:r>
-              <a:rPr lang="en-US" sz="1450" dirty="0">
+            <a:off x="4023360" y="4160520"/>
+            <a:ext cx="7132320" cy="731520"/>
+          </a:xfrm>
+          <a:prstGeom prst="rect">
+            <a:avLst/>
+          </a:prstGeom>
+          <a:noFill/>
+          <a:ln/>
+        </p:spPr>
+        <p:txBody>
+          <a:bodyPr wrap="square" rtlCol="0" anchor="ctr"/>
+          <a:lstStyle/>
+          <a:p>
+            <a:pPr indent="0" marL="0">
+              <a:buNone/>
+            </a:pPr>
+            <a:r>
+              <a:rPr lang="en-US" sz="1200" dirty="0">
                 <a:solidFill>
                   <a:srgbClr val="22201D"/>
                 </a:solidFill>
@@ -8139,7 +8139,68 @@
                 <a:ea typeface="Calibri" pitchFamily="34" charset="-122"/>
                 <a:cs typeface="Calibri" pitchFamily="34" charset="-120"/>
               </a:rPr>
-              <a:t>El documento incluye el caso piloto resuelto entero, con su expediente y con lo que hay que rectificar de lo ya redactado.</a:t>
+              <a:t>Método para elegir el contrato piloto, y un subconjunto mínimo de seis cláusulas para empezar. El catálogo entero no entra en el primer expediente.</a:t>
+            </a:r>
+            <a:endParaRPr lang="en-US" sz="1200" dirty="0"/>
+          </a:p>
+        </p:txBody>
+      </p:sp>
+      <p:sp>
+        <p:nvSpPr>
+          <p:cNvPr id="13" name="Shape 11"/>
+          <p:cNvSpPr/>
+          <p:nvPr/>
+        </p:nvSpPr>
+        <p:spPr>
+          <a:xfrm>
+            <a:off x="822960" y="5038344"/>
+            <a:ext cx="10515600" cy="841248"/>
+          </a:xfrm>
+          <a:prstGeom prst="roundRect">
+            <a:avLst>
+              <a:gd name="adj" fmla="val 10870"/>
+            </a:avLst>
+          </a:prstGeom>
+          <a:solidFill>
+            <a:srgbClr val="FFFFFF"/>
+          </a:solidFill>
+          <a:ln/>
+        </p:spPr>
+      </p:sp>
+      <p:sp>
+        <p:nvSpPr>
+          <p:cNvPr id="14" name="Text 12"/>
+          <p:cNvSpPr/>
+          <p:nvPr/>
+        </p:nvSpPr>
+        <p:spPr>
+          <a:xfrm>
+            <a:off x="1051560" y="5093208"/>
+            <a:ext cx="2834640" cy="731520"/>
+          </a:xfrm>
+          <a:prstGeom prst="rect">
+            <a:avLst/>
+          </a:prstGeom>
+          <a:noFill/>
+          <a:ln/>
+        </p:spPr>
+        <p:txBody>
+          <a:bodyPr wrap="square" rtlCol="0" anchor="ctr"/>
+          <a:lstStyle/>
+          <a:p>
+            <a:pPr indent="0" marL="0">
+              <a:buNone/>
+            </a:pPr>
+            <a:r>
+              <a:rPr lang="en-US" sz="1450" b="1" dirty="0">
+                <a:solidFill>
+                  <a:srgbClr val="1F3864"/>
+                </a:solidFill>
+                <a:latin typeface="Georgia" pitchFamily="34" charset="0"/>
+                <a:ea typeface="Georgia" pitchFamily="34" charset="-122"/>
+                <a:cs typeface="Georgia" pitchFamily="34" charset="-120"/>
+              </a:rPr>
+              <a:t>«Hay actores que no lo han visto»</a:t>
             </a:r>
             <a:endParaRPr lang="en-US" sz="1450" dirty="0"/>
           </a:p>
@@ -8147,38 +8208,77 @@
       </p:sp>
       <p:sp>
         <p:nvSpPr>
-          <p:cNvPr id="13" name="Text 11"/>
-          <p:cNvSpPr/>
-          <p:nvPr/>
-        </p:nvSpPr>
-        <p:spPr>
-          <a:xfrm>
-            <a:off x="822960" y="5989320"/>
-            <a:ext cx="10515600" cy="548640"/>
-          </a:xfrm>
-          <a:prstGeom prst="rect">
-            <a:avLst/>
-          </a:prstGeom>
-          <a:noFill/>
-          <a:ln/>
-        </p:spPr>
-        <p:txBody>
-          <a:bodyPr wrap="square" rtlCol="0" anchor="ctr"/>
-          <a:lstStyle/>
-          <a:p>
-            <a:pPr indent="0" marL="0">
-              <a:buNone/>
-            </a:pPr>
-            <a:r>
-              <a:rPr lang="en-US" sz="1400" i="1" dirty="0">
-                <a:solidFill>
-                  <a:srgbClr val="6E6A63"/>
+          <p:cNvPr id="15" name="Text 13"/>
+          <p:cNvSpPr/>
+          <p:nvPr/>
+        </p:nvSpPr>
+        <p:spPr>
+          <a:xfrm>
+            <a:off x="4023360" y="5093208"/>
+            <a:ext cx="7132320" cy="731520"/>
+          </a:xfrm>
+          <a:prstGeom prst="rect">
+            <a:avLst/>
+          </a:prstGeom>
+          <a:noFill/>
+          <a:ln/>
+        </p:spPr>
+        <p:txBody>
+          <a:bodyPr wrap="square" rtlCol="0" anchor="ctr"/>
+          <a:lstStyle/>
+          <a:p>
+            <a:pPr indent="0" marL="0">
+              <a:buNone/>
+            </a:pPr>
+            <a:r>
+              <a:rPr lang="en-US" sz="1200" dirty="0">
+                <a:solidFill>
+                  <a:srgbClr val="22201D"/>
                 </a:solidFill>
                 <a:latin typeface="Calibri" pitchFamily="34" charset="0"/>
                 <a:ea typeface="Calibri" pitchFamily="34" charset="-122"/>
                 <a:cs typeface="Calibri" pitchFamily="34" charset="-120"/>
               </a:rPr>
-              <a:t>Las tres objeciones se responden dentro del documento, no en una nota al pie.</a:t>
+              <a:t>Consulta preliminar anual, publicación del Anexo V antes de licitar, plazo por encima del mínimo y gradualidad. Si el mercado no puede cumplirlo, la exigencia no entra en el pliego.</a:t>
+            </a:r>
+            <a:endParaRPr lang="en-US" sz="1200" dirty="0"/>
+          </a:p>
+        </p:txBody>
+      </p:sp>
+      <p:sp>
+        <p:nvSpPr>
+          <p:cNvPr id="16" name="Text 14"/>
+          <p:cNvSpPr/>
+          <p:nvPr/>
+        </p:nvSpPr>
+        <p:spPr>
+          <a:xfrm>
+            <a:off x="822960" y="5989320"/>
+            <a:ext cx="10515600" cy="548640"/>
+          </a:xfrm>
+          <a:prstGeom prst="rect">
+            <a:avLst/>
+          </a:prstGeom>
+          <a:noFill/>
+          <a:ln/>
+        </p:spPr>
+        <p:txBody>
+          <a:bodyPr wrap="square" rtlCol="0" anchor="ctr"/>
+          <a:lstStyle/>
+          <a:p>
+            <a:pPr indent="0" marL="0">
+              <a:buNone/>
+            </a:pPr>
+            <a:r>
+              <a:rPr lang="en-US" sz="1400" i="1" dirty="0">
+                <a:solidFill>
+                  <a:srgbClr val="6E6A63"/>
+                </a:solidFill>
+                <a:latin typeface="Calibri" pitchFamily="34" charset="0"/>
+                <a:ea typeface="Calibri" pitchFamily="34" charset="-122"/>
+                <a:cs typeface="Calibri" pitchFamily="34" charset="-120"/>
+              </a:rPr>
+              <a:t>Las cuatro objeciones se citan enteras y se responden dentro del documento, no en una nota al pie.</a:t>
             </a:r>
             <a:endParaRPr lang="en-US" sz="1400" dirty="0"/>
           </a:p>

--- a/docs/descargas/presentacion-ai-clauses.pptx
+++ b/docs/descargas/presentacion-ai-clauses.pptx
@@ -4000,7 +4000,7 @@
                 <a:ea typeface="Calibri" pitchFamily="34" charset="-122"/>
                 <a:cs typeface="Calibri" pitchFamily="34" charset="-120"/>
               </a:rPr>
-              <a:t>La objeción interna de junio de 2026, con sus cuatro reproches, es la razón de ser de esta versión y está citada y respondida en el cuerpo del documento. Ningún órgano de contratación, intervención o asesoría jurídica se ha pronunciado sobre el catálogo.</a:t>
+              <a:t>Las cuatro dificultades del §M1.1 son la razón de ser de esta versión y se responden una a una en el cuerpo del documento. Ningún órgano de contratación, intervención o asesoría jurídica se ha pronunciado sobre el catálogo.</a:t>
             </a:r>
             <a:endParaRPr lang="en-US" sz="1100" dirty="0"/>
           </a:p>
@@ -7800,7 +7800,7 @@
                 <a:ea typeface="Georgia" pitchFamily="34" charset="-122"/>
                 <a:cs typeface="Georgia" pitchFamily="34" charset="-120"/>
               </a:rPr>
-              <a:t>De dónde sale: un problema real y cuatro objeciones</a:t>
+              <a:t>De dónde sale: un problema real y cuatro dificultades</a:t>
             </a:r>
             <a:endParaRPr lang="en-US" sz="3600" dirty="0"/>
           </a:p>
@@ -7839,7 +7839,7 @@
                 <a:ea typeface="Calibri" pitchFamily="34" charset="-122"/>
                 <a:cs typeface="Calibri" pitchFamily="34" charset="-120"/>
               </a:rPr>
-              <a:t>El clausulado nació en el Ayuntamiento de Pozuelo de Alarcón en 2026 y se sometió por escrito a la crítica de quien tendría que aplicarlo. Lo que esa crítica dijo es lo que da forma a esta versión.</a:t>
+              <a:t>El clausulado nació en el Ayuntamiento de Pozuelo de Alarcón en 2026. Su memoria empieza nombrando, sin suavizarlas, las cuatro dificultades que quienes lo han trabajado han observado que suceden en la contratación pública.</a:t>
             </a:r>
             <a:endParaRPr lang="en-US" sz="1750" dirty="0"/>
           </a:p>
@@ -7900,7 +7900,7 @@
                 <a:ea typeface="Georgia" pitchFamily="34" charset="-122"/>
                 <a:cs typeface="Georgia" pitchFamily="34" charset="-120"/>
               </a:rPr>
-              <a:t>«Artificioso al contrato»</a:t>
+              <a:t>La necesidad no la demanda aún el gestor</a:t>
             </a:r>
             <a:endParaRPr lang="en-US" sz="1450" dirty="0"/>
           </a:p>
@@ -8000,7 +8000,7 @@
                 <a:ea typeface="Georgia" pitchFamily="34" charset="-122"/>
                 <a:cs typeface="Georgia" pitchFamily="34" charset="-120"/>
               </a:rPr>
-              <a:t>«El seguimiento real es escaso»</a:t>
+              <a:t>El seguimiento real es escaso, y sólo mira el gasto</a:t>
             </a:r>
             <a:endParaRPr lang="en-US" sz="1450" dirty="0"/>
           </a:p>
@@ -8100,7 +8100,7 @@
                 <a:ea typeface="Georgia" pitchFamily="34" charset="-122"/>
                 <a:cs typeface="Georgia" pitchFamily="34" charset="-120"/>
               </a:rPr>
-              <a:t>«Demasiado abstracto»</a:t>
+              <a:t>El grado de abstracción es demasiado alto</a:t>
             </a:r>
             <a:endParaRPr lang="en-US" sz="1450" dirty="0"/>
           </a:p>
@@ -8200,7 +8200,7 @@
                 <a:ea typeface="Georgia" pitchFamily="34" charset="-122"/>
                 <a:cs typeface="Georgia" pitchFamily="34" charset="-120"/>
               </a:rPr>
-              <a:t>«Hay actores que no lo han visto»</a:t>
+              <a:t>Hay actores, y no sólo propios, que no lo han visto</a:t>
             </a:r>
             <a:endParaRPr lang="en-US" sz="1450" dirty="0"/>
           </a:p>
@@ -8278,7 +8278,7 @@
                 <a:ea typeface="Calibri" pitchFamily="34" charset="-122"/>
                 <a:cs typeface="Calibri" pitchFamily="34" charset="-120"/>
               </a:rPr>
-              <a:t>Las cuatro objeciones se citan enteras y se responden dentro del documento, no en una nota al pie.</a:t>
+              <a:t>Las cuatro se responden dentro del documento, no en una nota al pie: han cambiado su arquitectura, no su prólogo.</a:t>
             </a:r>
             <a:endParaRPr lang="en-US" sz="1400" dirty="0"/>
           </a:p>

--- a/docs/descargas/presentacion-ai-clauses.pptx
+++ b/docs/descargas/presentacion-ai-clauses.pptx
@@ -3413,7 +3413,7 @@
                 <a:ea typeface="Calibri" pitchFamily="34" charset="-122"/>
                 <a:cs typeface="Calibri" pitchFamily="34" charset="-120"/>
               </a:rPr>
-              <a:t>Un trabajo conjunto de varios meses entre cinco personas, cada una desde su oficio, con el Ayuntamiento de Pozuelo de Alarcón como banco de pruebas real.</a:t>
+              <a:t>Un trabajo conjunto de varios meses entre siete personas, cada una desde su oficio.</a:t>
             </a:r>
             <a:endParaRPr lang="en-US" sz="1600" dirty="0"/>
           </a:p>
@@ -3883,7 +3883,7 @@
                 <a:ea typeface="Georgia" pitchFamily="34" charset="-122"/>
                 <a:cs typeface="Georgia" pitchFamily="34" charset="-120"/>
               </a:rPr>
-              <a:t>Enrique Jiménez y Roberto García</a:t>
+              <a:t>Enrique Jiménez · Roberto García · Luis Llorente</a:t>
             </a:r>
             <a:endParaRPr lang="en-US" sz="1550" dirty="0"/>
           </a:p>
@@ -3922,7 +3922,7 @@
                 <a:ea typeface="Calibri" pitchFamily="34" charset="-122"/>
                 <a:cs typeface="Calibri" pitchFamily="34" charset="-120"/>
               </a:rPr>
-              <a:t>Responsable de los contratos de innovación · Jefe de informática — Ayuntamiento de Pozuelo de Alarcón</a:t>
+              <a:t>Contratos de innovación · Jefatura de informática · Negociado de sistemas de información — Ayuntamiento de Pozuelo de Alarcón</a:t>
             </a:r>
             <a:endParaRPr lang="en-US" sz="1080" dirty="0"/>
           </a:p>
@@ -3961,7 +3961,7 @@
                 <a:ea typeface="Calibri" pitchFamily="34" charset="-122"/>
                 <a:cs typeface="Calibri" pitchFamily="34" charset="-120"/>
               </a:rPr>
-              <a:t>Autores y supervisores técnicos: han aportado el contraste de la práctica municipal y la supervisión técnica de la formulación contractual.</a:t>
+              <a:t>Autores y supervisores técnicos: el contraste de la práctica municipal y la supervisión técnica de la formulación contractual. Con la lectura crítica de Francisco Javier Escalona Moyano, Interventor General, a título personal.</a:t>
             </a:r>
             <a:endParaRPr lang="en-US" sz="1140" dirty="0"/>
           </a:p>

--- a/docs/descargas/presentacion-ai-clauses.pptx
+++ b/docs/descargas/presentacion-ai-clauses.pptx
@@ -3413,7 +3413,7 @@
                 <a:ea typeface="Calibri" pitchFamily="34" charset="-122"/>
                 <a:cs typeface="Calibri" pitchFamily="34" charset="-120"/>
               </a:rPr>
-              <a:t>Un trabajo conjunto de varios meses entre siete personas, cada una desde su oficio.</a:t>
+              <a:t>Un trabajo conjunto de varios meses: tres firmantes y las aportaciones técnicas que se citan al final.</a:t>
             </a:r>
             <a:endParaRPr lang="en-US" sz="1600" dirty="0"/>
           </a:p>
@@ -3883,7 +3883,7 @@
                 <a:ea typeface="Georgia" pitchFamily="34" charset="-122"/>
                 <a:cs typeface="Georgia" pitchFamily="34" charset="-120"/>
               </a:rPr>
-              <a:t>Enrique Jiménez · Roberto García · Luis Llorente</a:t>
+              <a:t>Otras aportaciones</a:t>
             </a:r>
             <a:endParaRPr lang="en-US" sz="1550" dirty="0"/>
           </a:p>
@@ -3922,7 +3922,7 @@
                 <a:ea typeface="Calibri" pitchFamily="34" charset="-122"/>
                 <a:cs typeface="Calibri" pitchFamily="34" charset="-120"/>
               </a:rPr>
-              <a:t>Contratos de innovación · Jefatura de informática · Negociado de sistemas de información — Ayuntamiento de Pozuelo de Alarcón</a:t>
+              <a:t>Personal técnico del Ayuntamiento de Pozuelo de Alarcón</a:t>
             </a:r>
             <a:endParaRPr lang="en-US" sz="1080" dirty="0"/>
           </a:p>
@@ -3961,7 +3961,7 @@
                 <a:ea typeface="Calibri" pitchFamily="34" charset="-122"/>
                 <a:cs typeface="Calibri" pitchFamily="34" charset="-120"/>
               </a:rPr>
-              <a:t>Autores y supervisores técnicos: el contraste de la práctica municipal y la supervisión técnica de la formulación contractual. Con la lectura crítica de Francisco Javier Escalona Moyano, Interventor General, a título personal.</a:t>
+              <a:t>El contraste de la práctica municipal y la lectura crítica del borrador. Sus nombres se incorporarán en la siguiente versión, con su consentimiento expreso.</a:t>
             </a:r>
             <a:endParaRPr lang="en-US" sz="1140" dirty="0"/>
           </a:p>

--- a/docs/descargas/presentacion-ai-clauses.pptx
+++ b/docs/descargas/presentacion-ai-clauses.pptx
@@ -2722,12 +2722,12 @@
         </p:nvSpPr>
         <p:spPr>
           <a:xfrm>
-            <a:off x="822960" y="1417320"/>
-            <a:ext cx="10515600" cy="987552"/>
+            <a:off x="822960" y="1371600"/>
+            <a:ext cx="10515600" cy="822960"/>
           </a:xfrm>
           <a:prstGeom prst="roundRect">
             <a:avLst>
-              <a:gd name="adj" fmla="val 9259"/>
+              <a:gd name="adj" fmla="val 11111"/>
             </a:avLst>
           </a:prstGeom>
           <a:solidFill>
@@ -2744,24 +2744,24 @@
         </p:nvSpPr>
         <p:spPr>
           <a:xfrm>
-            <a:off x="1097280" y="1527048"/>
-            <a:ext cx="3108960" cy="768096"/>
-          </a:xfrm>
-          <a:prstGeom prst="rect">
-            <a:avLst/>
-          </a:prstGeom>
-          <a:noFill/>
-          <a:ln/>
-        </p:spPr>
-        <p:txBody>
-          <a:bodyPr wrap="square" rtlCol="0" anchor="ctr"/>
-          <a:lstStyle/>
-          <a:p>
-            <a:pPr indent="0" marL="0">
-              <a:buNone/>
-            </a:pPr>
-            <a:r>
-              <a:rPr lang="en-US" sz="1650" b="1" dirty="0">
+            <a:off x="1097280" y="1444752"/>
+            <a:ext cx="3108960" cy="676656"/>
+          </a:xfrm>
+          <a:prstGeom prst="rect">
+            <a:avLst/>
+          </a:prstGeom>
+          <a:noFill/>
+          <a:ln/>
+        </p:spPr>
+        <p:txBody>
+          <a:bodyPr wrap="square" rtlCol="0" anchor="ctr"/>
+          <a:lstStyle/>
+          <a:p>
+            <a:pPr indent="0" marL="0">
+              <a:buNone/>
+            </a:pPr>
+            <a:r>
+              <a:rPr lang="en-US" sz="1500" b="1" dirty="0">
                 <a:solidFill>
                   <a:srgbClr val="1F3864"/>
                 </a:solidFill>
@@ -2771,7 +2771,7 @@
               </a:rPr>
               <a:t>El clausulado completo</a:t>
             </a:r>
-            <a:endParaRPr lang="en-US" sz="1650" dirty="0"/>
+            <a:endParaRPr lang="en-US" sz="1500" dirty="0"/>
           </a:p>
         </p:txBody>
       </p:sp>
@@ -2783,24 +2783,24 @@
         </p:nvSpPr>
         <p:spPr>
           <a:xfrm>
-            <a:off x="4297680" y="1527048"/>
-            <a:ext cx="4937760" cy="768096"/>
-          </a:xfrm>
-          <a:prstGeom prst="rect">
-            <a:avLst/>
-          </a:prstGeom>
-          <a:noFill/>
-          <a:ln/>
-        </p:spPr>
-        <p:txBody>
-          <a:bodyPr wrap="square" rtlCol="0" anchor="ctr"/>
-          <a:lstStyle/>
-          <a:p>
-            <a:pPr indent="0" marL="0">
-              <a:buNone/>
-            </a:pPr>
-            <a:r>
-              <a:rPr lang="en-US" sz="1280" dirty="0">
+            <a:off x="4297680" y="1444752"/>
+            <a:ext cx="4937760" cy="676656"/>
+          </a:xfrm>
+          <a:prstGeom prst="rect">
+            <a:avLst/>
+          </a:prstGeom>
+          <a:noFill/>
+          <a:ln/>
+        </p:spPr>
+        <p:txBody>
+          <a:bodyPr wrap="square" rtlCol="0" anchor="ctr"/>
+          <a:lstStyle/>
+          <a:p>
+            <a:pPr indent="0" marL="0">
+              <a:buNone/>
+            </a:pPr>
+            <a:r>
+              <a:rPr lang="en-US" sz="1160" dirty="0">
                 <a:solidFill>
                   <a:srgbClr val="22201D"/>
                 </a:solidFill>
@@ -2810,7 +2810,7 @@
               </a:rPr>
               <a:t>Catálogo, memoria justificativa para los órganos de control, circuito del expediente, ejemplo trabajado y anexos con todos los modelos.</a:t>
             </a:r>
-            <a:endParaRPr lang="en-US" sz="1280" dirty="0"/>
+            <a:endParaRPr lang="en-US" sz="1160" dirty="0"/>
           </a:p>
         </p:txBody>
       </p:sp>
@@ -2822,24 +2822,24 @@
         </p:nvSpPr>
         <p:spPr>
           <a:xfrm>
-            <a:off x="9326880" y="1527048"/>
-            <a:ext cx="1828800" cy="768096"/>
-          </a:xfrm>
-          <a:prstGeom prst="rect">
-            <a:avLst/>
-          </a:prstGeom>
-          <a:noFill/>
-          <a:ln/>
-        </p:spPr>
-        <p:txBody>
-          <a:bodyPr wrap="square" rtlCol="0" anchor="ctr"/>
-          <a:lstStyle/>
-          <a:p>
-            <a:pPr indent="0" marL="0">
-              <a:buNone/>
-            </a:pPr>
-            <a:r>
-              <a:rPr lang="en-US" sz="1120" i="1" dirty="0">
+            <a:off x="9326880" y="1444752"/>
+            <a:ext cx="1828800" cy="676656"/>
+          </a:xfrm>
+          <a:prstGeom prst="rect">
+            <a:avLst/>
+          </a:prstGeom>
+          <a:noFill/>
+          <a:ln/>
+        </p:spPr>
+        <p:txBody>
+          <a:bodyPr wrap="square" rtlCol="0" anchor="ctr"/>
+          <a:lstStyle/>
+          <a:p>
+            <a:pPr indent="0" marL="0">
+              <a:buNone/>
+            </a:pPr>
+            <a:r>
+              <a:rPr lang="en-US" sz="1050" i="1" dirty="0">
                 <a:solidFill>
                   <a:srgbClr val="6E6A63"/>
                 </a:solidFill>
@@ -2849,7 +2849,7 @@
               </a:rPr>
               <a:t>Quien redacta y quien fiscaliza</a:t>
             </a:r>
-            <a:endParaRPr lang="en-US" sz="1120" dirty="0"/>
+            <a:endParaRPr lang="en-US" sz="1050" dirty="0"/>
           </a:p>
         </p:txBody>
       </p:sp>
@@ -2861,12 +2861,12 @@
         </p:nvSpPr>
         <p:spPr>
           <a:xfrm>
-            <a:off x="822960" y="2560320"/>
-            <a:ext cx="10515600" cy="987552"/>
+            <a:off x="822960" y="2304288"/>
+            <a:ext cx="10515600" cy="822960"/>
           </a:xfrm>
           <a:prstGeom prst="roundRect">
             <a:avLst>
-              <a:gd name="adj" fmla="val 9259"/>
+              <a:gd name="adj" fmla="val 11111"/>
             </a:avLst>
           </a:prstGeom>
           <a:solidFill>
@@ -2883,24 +2883,24 @@
         </p:nvSpPr>
         <p:spPr>
           <a:xfrm>
-            <a:off x="1097280" y="2670048"/>
-            <a:ext cx="3108960" cy="768096"/>
-          </a:xfrm>
-          <a:prstGeom prst="rect">
-            <a:avLst/>
-          </a:prstGeom>
-          <a:noFill/>
-          <a:ln/>
-        </p:spPr>
-        <p:txBody>
-          <a:bodyPr wrap="square" rtlCol="0" anchor="ctr"/>
-          <a:lstStyle/>
-          <a:p>
-            <a:pPr indent="0" marL="0">
-              <a:buNone/>
-            </a:pPr>
-            <a:r>
-              <a:rPr lang="en-US" sz="1650" b="1" dirty="0">
+            <a:off x="1097280" y="2377440"/>
+            <a:ext cx="3108960" cy="676656"/>
+          </a:xfrm>
+          <a:prstGeom prst="rect">
+            <a:avLst/>
+          </a:prstGeom>
+          <a:noFill/>
+          <a:ln/>
+        </p:spPr>
+        <p:txBody>
+          <a:bodyPr wrap="square" rtlCol="0" anchor="ctr"/>
+          <a:lstStyle/>
+          <a:p>
+            <a:pPr indent="0" marL="0">
+              <a:buNone/>
+            </a:pPr>
+            <a:r>
+              <a:rPr lang="en-US" sz="1500" b="1" dirty="0">
                 <a:solidFill>
                   <a:srgbClr val="1F3864"/>
                 </a:solidFill>
@@ -2910,7 +2910,7 @@
               </a:rPr>
               <a:t>La guía municipal · 20 páginas</a:t>
             </a:r>
-            <a:endParaRPr lang="en-US" sz="1650" dirty="0"/>
+            <a:endParaRPr lang="en-US" sz="1500" dirty="0"/>
           </a:p>
         </p:txBody>
       </p:sp>
@@ -2922,24 +2922,24 @@
         </p:nvSpPr>
         <p:spPr>
           <a:xfrm>
-            <a:off x="4297680" y="2670048"/>
-            <a:ext cx="4937760" cy="768096"/>
-          </a:xfrm>
-          <a:prstGeom prst="rect">
-            <a:avLst/>
-          </a:prstGeom>
-          <a:noFill/>
-          <a:ln/>
-        </p:spPr>
-        <p:txBody>
-          <a:bodyPr wrap="square" rtlCol="0" anchor="ctr"/>
-          <a:lstStyle/>
-          <a:p>
-            <a:pPr indent="0" marL="0">
-              <a:buNone/>
-            </a:pPr>
-            <a:r>
-              <a:rPr lang="en-US" sz="1280" dirty="0">
+            <a:off x="4297680" y="2377440"/>
+            <a:ext cx="4937760" cy="676656"/>
+          </a:xfrm>
+          <a:prstGeom prst="rect">
+            <a:avLst/>
+          </a:prstGeom>
+          <a:noFill/>
+          <a:ln/>
+        </p:spPr>
+        <p:txBody>
+          <a:bodyPr wrap="square" rtlCol="0" anchor="ctr"/>
+          <a:lstStyle/>
+          <a:p>
+            <a:pPr indent="0" marL="0">
+              <a:buNone/>
+            </a:pPr>
+            <a:r>
+              <a:rPr lang="en-US" sz="1160" dirty="0">
                 <a:solidFill>
                   <a:srgbClr val="22201D"/>
                 </a:solidFill>
@@ -2949,7 +2949,7 @@
               </a:rPr>
               <a:t>Cómo decidir, motivar, seleccionar, copiar y verificar sin recorrer el catálogo entero.</a:t>
             </a:r>
-            <a:endParaRPr lang="en-US" sz="1280" dirty="0"/>
+            <a:endParaRPr lang="en-US" sz="1160" dirty="0"/>
           </a:p>
         </p:txBody>
       </p:sp>
@@ -2961,24 +2961,24 @@
         </p:nvSpPr>
         <p:spPr>
           <a:xfrm>
-            <a:off x="9326880" y="2670048"/>
-            <a:ext cx="1828800" cy="768096"/>
-          </a:xfrm>
-          <a:prstGeom prst="rect">
-            <a:avLst/>
-          </a:prstGeom>
-          <a:noFill/>
-          <a:ln/>
-        </p:spPr>
-        <p:txBody>
-          <a:bodyPr wrap="square" rtlCol="0" anchor="ctr"/>
-          <a:lstStyle/>
-          <a:p>
-            <a:pPr indent="0" marL="0">
-              <a:buNone/>
-            </a:pPr>
-            <a:r>
-              <a:rPr lang="en-US" sz="1120" i="1" dirty="0">
+            <a:off x="9326880" y="2377440"/>
+            <a:ext cx="1828800" cy="676656"/>
+          </a:xfrm>
+          <a:prstGeom prst="rect">
+            <a:avLst/>
+          </a:prstGeom>
+          <a:noFill/>
+          <a:ln/>
+        </p:spPr>
+        <p:txBody>
+          <a:bodyPr wrap="square" rtlCol="0" anchor="ctr"/>
+          <a:lstStyle/>
+          <a:p>
+            <a:pPr indent="0" marL="0">
+              <a:buNone/>
+            </a:pPr>
+            <a:r>
+              <a:rPr lang="en-US" sz="1050" i="1" dirty="0">
                 <a:solidFill>
                   <a:srgbClr val="6E6A63"/>
                 </a:solidFill>
@@ -2988,7 +2988,7 @@
               </a:rPr>
               <a:t>Concejalía, Contratación, Intervención y TI</a:t>
             </a:r>
-            <a:endParaRPr lang="en-US" sz="1120" dirty="0"/>
+            <a:endParaRPr lang="en-US" sz="1050" dirty="0"/>
           </a:p>
         </p:txBody>
       </p:sp>
@@ -3000,12 +3000,12 @@
         </p:nvSpPr>
         <p:spPr>
           <a:xfrm>
-            <a:off x="822960" y="3703320"/>
-            <a:ext cx="10515600" cy="987552"/>
+            <a:off x="822960" y="3236976"/>
+            <a:ext cx="10515600" cy="822960"/>
           </a:xfrm>
           <a:prstGeom prst="roundRect">
             <a:avLst>
-              <a:gd name="adj" fmla="val 9259"/>
+              <a:gd name="adj" fmla="val 11111"/>
             </a:avLst>
           </a:prstGeom>
           <a:solidFill>
@@ -3022,24 +3022,24 @@
         </p:nvSpPr>
         <p:spPr>
           <a:xfrm>
-            <a:off x="1097280" y="3813048"/>
-            <a:ext cx="3108960" cy="768096"/>
-          </a:xfrm>
-          <a:prstGeom prst="rect">
-            <a:avLst/>
-          </a:prstGeom>
-          <a:noFill/>
-          <a:ln/>
-        </p:spPr>
-        <p:txBody>
-          <a:bodyPr wrap="square" rtlCol="0" anchor="ctr"/>
-          <a:lstStyle/>
-          <a:p>
-            <a:pPr indent="0" marL="0">
-              <a:buNone/>
-            </a:pPr>
-            <a:r>
-              <a:rPr lang="en-US" sz="1650" b="1" dirty="0">
+            <a:off x="1097280" y="3310128"/>
+            <a:ext cx="3108960" cy="676656"/>
+          </a:xfrm>
+          <a:prstGeom prst="rect">
+            <a:avLst/>
+          </a:prstGeom>
+          <a:noFill/>
+          <a:ln/>
+        </p:spPr>
+        <p:txBody>
+          <a:bodyPr wrap="square" rtlCol="0" anchor="ctr"/>
+          <a:lstStyle/>
+          <a:p>
+            <a:pPr indent="0" marL="0">
+              <a:buNone/>
+            </a:pPr>
+            <a:r>
+              <a:rPr lang="en-US" sz="1500" b="1" dirty="0">
                 <a:solidFill>
                   <a:srgbClr val="1F3864"/>
                 </a:solidFill>
@@ -3049,7 +3049,7 @@
               </a:rPr>
               <a:t>El resumen y la guía de uso</a:t>
             </a:r>
-            <a:endParaRPr lang="en-US" sz="1650" dirty="0"/>
+            <a:endParaRPr lang="en-US" sz="1500" dirty="0"/>
           </a:p>
         </p:txBody>
       </p:sp>
@@ -3061,24 +3061,24 @@
         </p:nvSpPr>
         <p:spPr>
           <a:xfrm>
-            <a:off x="4297680" y="3813048"/>
-            <a:ext cx="4937760" cy="768096"/>
-          </a:xfrm>
-          <a:prstGeom prst="rect">
-            <a:avLst/>
-          </a:prstGeom>
-          <a:noFill/>
-          <a:ln/>
-        </p:spPr>
-        <p:txBody>
-          <a:bodyPr wrap="square" rtlCol="0" anchor="ctr"/>
-          <a:lstStyle/>
-          <a:p>
-            <a:pPr indent="0" marL="0">
-              <a:buNone/>
-            </a:pPr>
-            <a:r>
-              <a:rPr lang="en-US" sz="1280" dirty="0">
+            <a:off x="4297680" y="3310128"/>
+            <a:ext cx="4937760" cy="676656"/>
+          </a:xfrm>
+          <a:prstGeom prst="rect">
+            <a:avLst/>
+          </a:prstGeom>
+          <a:noFill/>
+          <a:ln/>
+        </p:spPr>
+        <p:txBody>
+          <a:bodyPr wrap="square" rtlCol="0" anchor="ctr"/>
+          <a:lstStyle/>
+          <a:p>
+            <a:pPr indent="0" marL="0">
+              <a:buNone/>
+            </a:pPr>
+            <a:r>
+              <a:rPr lang="en-US" sz="1160" dirty="0">
                 <a:solidFill>
                   <a:srgbClr val="22201D"/>
                 </a:solidFill>
@@ -3088,7 +3088,7 @@
               </a:rPr>
               <a:t>La primera parte del documento, escrita para quien no sabe nada de contratación ni de tecnología.</a:t>
             </a:r>
-            <a:endParaRPr lang="en-US" sz="1280" dirty="0"/>
+            <a:endParaRPr lang="en-US" sz="1160" dirty="0"/>
           </a:p>
         </p:txBody>
       </p:sp>
@@ -3100,24 +3100,24 @@
         </p:nvSpPr>
         <p:spPr>
           <a:xfrm>
-            <a:off x="9326880" y="3813048"/>
-            <a:ext cx="1828800" cy="768096"/>
-          </a:xfrm>
-          <a:prstGeom prst="rect">
-            <a:avLst/>
-          </a:prstGeom>
-          <a:noFill/>
-          <a:ln/>
-        </p:spPr>
-        <p:txBody>
-          <a:bodyPr wrap="square" rtlCol="0" anchor="ctr"/>
-          <a:lstStyle/>
-          <a:p>
-            <a:pPr indent="0" marL="0">
-              <a:buNone/>
-            </a:pPr>
-            <a:r>
-              <a:rPr lang="en-US" sz="1120" i="1" dirty="0">
+            <a:off x="9326880" y="3310128"/>
+            <a:ext cx="1828800" cy="676656"/>
+          </a:xfrm>
+          <a:prstGeom prst="rect">
+            <a:avLst/>
+          </a:prstGeom>
+          <a:noFill/>
+          <a:ln/>
+        </p:spPr>
+        <p:txBody>
+          <a:bodyPr wrap="square" rtlCol="0" anchor="ctr"/>
+          <a:lstStyle/>
+          <a:p>
+            <a:pPr indent="0" marL="0">
+              <a:buNone/>
+            </a:pPr>
+            <a:r>
+              <a:rPr lang="en-US" sz="1050" i="1" dirty="0">
                 <a:solidFill>
                   <a:srgbClr val="6E6A63"/>
                 </a:solidFill>
@@ -3127,7 +3127,7 @@
               </a:rPr>
               <a:t>Alcaldía, concejalías, prensa</a:t>
             </a:r>
-            <a:endParaRPr lang="en-US" sz="1120" dirty="0"/>
+            <a:endParaRPr lang="en-US" sz="1050" dirty="0"/>
           </a:p>
         </p:txBody>
       </p:sp>
@@ -3139,12 +3139,12 @@
         </p:nvSpPr>
         <p:spPr>
           <a:xfrm>
-            <a:off x="822960" y="4846320"/>
-            <a:ext cx="10515600" cy="987552"/>
+            <a:off x="822960" y="4169664"/>
+            <a:ext cx="10515600" cy="822960"/>
           </a:xfrm>
           <a:prstGeom prst="roundRect">
             <a:avLst>
-              <a:gd name="adj" fmla="val 9259"/>
+              <a:gd name="adj" fmla="val 11111"/>
             </a:avLst>
           </a:prstGeom>
           <a:solidFill>
@@ -3161,24 +3161,24 @@
         </p:nvSpPr>
         <p:spPr>
           <a:xfrm>
-            <a:off x="1097280" y="4956048"/>
-            <a:ext cx="3108960" cy="768096"/>
-          </a:xfrm>
-          <a:prstGeom prst="rect">
-            <a:avLst/>
-          </a:prstGeom>
-          <a:noFill/>
-          <a:ln/>
-        </p:spPr>
-        <p:txBody>
-          <a:bodyPr wrap="square" rtlCol="0" anchor="ctr"/>
-          <a:lstStyle/>
-          <a:p>
-            <a:pPr indent="0" marL="0">
-              <a:buNone/>
-            </a:pPr>
-            <a:r>
-              <a:rPr lang="en-US" sz="1650" b="1" dirty="0">
+            <a:off x="1097280" y="4242816"/>
+            <a:ext cx="3108960" cy="676656"/>
+          </a:xfrm>
+          <a:prstGeom prst="rect">
+            <a:avLst/>
+          </a:prstGeom>
+          <a:noFill/>
+          <a:ln/>
+        </p:spPr>
+        <p:txBody>
+          <a:bodyPr wrap="square" rtlCol="0" anchor="ctr"/>
+          <a:lstStyle/>
+          <a:p>
+            <a:pPr indent="0" marL="0">
+              <a:buNone/>
+            </a:pPr>
+            <a:r>
+              <a:rPr lang="en-US" sz="1500" b="1" dirty="0">
                 <a:solidFill>
                   <a:srgbClr val="1F3864"/>
                 </a:solidFill>
@@ -3188,7 +3188,7 @@
               </a:rPr>
               <a:t>Esta presentación</a:t>
             </a:r>
-            <a:endParaRPr lang="en-US" sz="1650" dirty="0"/>
+            <a:endParaRPr lang="en-US" sz="1500" dirty="0"/>
           </a:p>
         </p:txBody>
       </p:sp>
@@ -3200,24 +3200,24 @@
         </p:nvSpPr>
         <p:spPr>
           <a:xfrm>
-            <a:off x="4297680" y="4956048"/>
-            <a:ext cx="4937760" cy="768096"/>
-          </a:xfrm>
-          <a:prstGeom prst="rect">
-            <a:avLst/>
-          </a:prstGeom>
-          <a:noFill/>
-          <a:ln/>
-        </p:spPr>
-        <p:txBody>
-          <a:bodyPr wrap="square" rtlCol="0" anchor="ctr"/>
-          <a:lstStyle/>
-          <a:p>
-            <a:pPr indent="0" marL="0">
-              <a:buNone/>
-            </a:pPr>
-            <a:r>
-              <a:rPr lang="en-US" sz="1280" dirty="0">
+            <a:off x="4297680" y="4242816"/>
+            <a:ext cx="4937760" cy="676656"/>
+          </a:xfrm>
+          <a:prstGeom prst="rect">
+            <a:avLst/>
+          </a:prstGeom>
+          <a:noFill/>
+          <a:ln/>
+        </p:spPr>
+        <p:txBody>
+          <a:bodyPr wrap="square" rtlCol="0" anchor="ctr"/>
+          <a:lstStyle/>
+          <a:p>
+            <a:pPr indent="0" marL="0">
+              <a:buNone/>
+            </a:pPr>
+            <a:r>
+              <a:rPr lang="en-US" sz="1160" dirty="0">
                 <a:solidFill>
                   <a:srgbClr val="22201D"/>
                 </a:solidFill>
@@ -3227,7 +3227,7 @@
               </a:rPr>
               <a:t>El problema y la solución, sin que haga falta saber nada previo.</a:t>
             </a:r>
-            <a:endParaRPr lang="en-US" sz="1280" dirty="0"/>
+            <a:endParaRPr lang="en-US" sz="1160" dirty="0"/>
           </a:p>
         </p:txBody>
       </p:sp>
@@ -3239,24 +3239,24 @@
         </p:nvSpPr>
         <p:spPr>
           <a:xfrm>
-            <a:off x="9326880" y="4956048"/>
-            <a:ext cx="1828800" cy="768096"/>
-          </a:xfrm>
-          <a:prstGeom prst="rect">
-            <a:avLst/>
-          </a:prstGeom>
-          <a:noFill/>
-          <a:ln/>
-        </p:spPr>
-        <p:txBody>
-          <a:bodyPr wrap="square" rtlCol="0" anchor="ctr"/>
-          <a:lstStyle/>
-          <a:p>
-            <a:pPr indent="0" marL="0">
-              <a:buNone/>
-            </a:pPr>
-            <a:r>
-              <a:rPr lang="en-US" sz="1120" i="1" dirty="0">
+            <a:off x="9326880" y="4242816"/>
+            <a:ext cx="1828800" cy="676656"/>
+          </a:xfrm>
+          <a:prstGeom prst="rect">
+            <a:avLst/>
+          </a:prstGeom>
+          <a:noFill/>
+          <a:ln/>
+        </p:spPr>
+        <p:txBody>
+          <a:bodyPr wrap="square" rtlCol="0" anchor="ctr"/>
+          <a:lstStyle/>
+          <a:p>
+            <a:pPr indent="0" marL="0">
+              <a:buNone/>
+            </a:pPr>
+            <a:r>
+              <a:rPr lang="en-US" sz="1050" i="1" dirty="0">
                 <a:solidFill>
                   <a:srgbClr val="6E6A63"/>
                 </a:solidFill>
@@ -3266,13 +3266,152 @@
               </a:rPr>
               <a:t>Cualquier sala</a:t>
             </a:r>
-            <a:endParaRPr lang="en-US" sz="1120" dirty="0"/>
-          </a:p>
-        </p:txBody>
-      </p:sp>
-      <p:sp>
-        <p:nvSpPr>
-          <p:cNvPr id="19" name="Text 17"/>
+            <a:endParaRPr lang="en-US" sz="1050" dirty="0"/>
+          </a:p>
+        </p:txBody>
+      </p:sp>
+      <p:sp>
+        <p:nvSpPr>
+          <p:cNvPr id="19" name="Shape 17"/>
+          <p:cNvSpPr/>
+          <p:nvPr/>
+        </p:nvSpPr>
+        <p:spPr>
+          <a:xfrm>
+            <a:off x="822960" y="5102352"/>
+            <a:ext cx="10515600" cy="822960"/>
+          </a:xfrm>
+          <a:prstGeom prst="roundRect">
+            <a:avLst>
+              <a:gd name="adj" fmla="val 11111"/>
+            </a:avLst>
+          </a:prstGeom>
+          <a:solidFill>
+            <a:srgbClr val="EDF1F8"/>
+          </a:solidFill>
+          <a:ln/>
+        </p:spPr>
+      </p:sp>
+      <p:sp>
+        <p:nvSpPr>
+          <p:cNvPr id="20" name="Text 18"/>
+          <p:cNvSpPr/>
+          <p:nvPr/>
+        </p:nvSpPr>
+        <p:spPr>
+          <a:xfrm>
+            <a:off x="1097280" y="5175504"/>
+            <a:ext cx="3108960" cy="676656"/>
+          </a:xfrm>
+          <a:prstGeom prst="rect">
+            <a:avLst/>
+          </a:prstGeom>
+          <a:noFill/>
+          <a:ln/>
+        </p:spPr>
+        <p:txBody>
+          <a:bodyPr wrap="square" rtlCol="0" anchor="ctr"/>
+          <a:lstStyle/>
+          <a:p>
+            <a:pPr indent="0" marL="0">
+              <a:buNone/>
+            </a:pPr>
+            <a:r>
+              <a:rPr lang="en-US" sz="1500" b="1" dirty="0">
+                <a:solidFill>
+                  <a:srgbClr val="1F3864"/>
+                </a:solidFill>
+                <a:latin typeface="Georgia" pitchFamily="34" charset="0"/>
+                <a:ea typeface="Georgia" pitchFamily="34" charset="-122"/>
+                <a:cs typeface="Georgia" pitchFamily="34" charset="-120"/>
+              </a:rPr>
+              <a:t>Y dentro, un manual de tramitación</a:t>
+            </a:r>
+            <a:endParaRPr lang="en-US" sz="1500" dirty="0"/>
+          </a:p>
+        </p:txBody>
+      </p:sp>
+      <p:sp>
+        <p:nvSpPr>
+          <p:cNvPr id="21" name="Text 19"/>
+          <p:cNvSpPr/>
+          <p:nvPr/>
+        </p:nvSpPr>
+        <p:spPr>
+          <a:xfrm>
+            <a:off x="4297680" y="5175504"/>
+            <a:ext cx="4937760" cy="676656"/>
+          </a:xfrm>
+          <a:prstGeom prst="rect">
+            <a:avLst/>
+          </a:prstGeom>
+          <a:noFill/>
+          <a:ln/>
+        </p:spPr>
+        <p:txBody>
+          <a:bodyPr wrap="square" rtlCol="0" anchor="ctr"/>
+          <a:lstStyle/>
+          <a:p>
+            <a:pPr indent="0" marL="0">
+              <a:buNone/>
+            </a:pPr>
+            <a:r>
+              <a:rPr lang="en-US" sz="1160" dirty="0">
+                <a:solidFill>
+                  <a:srgbClr val="22201D"/>
+                </a:solidFill>
+                <a:latin typeface="Calibri" pitchFamily="34" charset="0"/>
+                <a:ea typeface="Calibri" pitchFamily="34" charset="-122"/>
+                <a:cs typeface="Calibri" pitchFamily="34" charset="-120"/>
+              </a:rPr>
+              <a:t>La Parte V es el circuito completo del expediente —los veintiún documentos, quién firma cada uno y en qué orden— y no tiene nada de específico de la IA.</a:t>
+            </a:r>
+            <a:endParaRPr lang="en-US" sz="1160" dirty="0"/>
+          </a:p>
+        </p:txBody>
+      </p:sp>
+      <p:sp>
+        <p:nvSpPr>
+          <p:cNvPr id="22" name="Text 20"/>
+          <p:cNvSpPr/>
+          <p:nvPr/>
+        </p:nvSpPr>
+        <p:spPr>
+          <a:xfrm>
+            <a:off x="9326880" y="5175504"/>
+            <a:ext cx="1828800" cy="676656"/>
+          </a:xfrm>
+          <a:prstGeom prst="rect">
+            <a:avLst/>
+          </a:prstGeom>
+          <a:noFill/>
+          <a:ln/>
+        </p:spPr>
+        <p:txBody>
+          <a:bodyPr wrap="square" rtlCol="0" anchor="ctr"/>
+          <a:lstStyle/>
+          <a:p>
+            <a:pPr indent="0" marL="0">
+              <a:buNone/>
+            </a:pPr>
+            <a:r>
+              <a:rPr lang="en-US" sz="1050" i="1" dirty="0">
+                <a:solidFill>
+                  <a:srgbClr val="6E6A63"/>
+                </a:solidFill>
+                <a:latin typeface="Calibri" pitchFamily="34" charset="0"/>
+                <a:ea typeface="Calibri" pitchFamily="34" charset="-122"/>
+                <a:cs typeface="Calibri" pitchFamily="34" charset="-120"/>
+              </a:rPr>
+              <a:t>Quien tramita expedientes</a:t>
+            </a:r>
+            <a:endParaRPr lang="en-US" sz="1050" dirty="0"/>
+          </a:p>
+        </p:txBody>
+      </p:sp>
+      <p:sp>
+        <p:nvSpPr>
+          <p:cNvPr id="23" name="Text 21"/>
           <p:cNvSpPr/>
           <p:nvPr/>
         </p:nvSpPr>
@@ -3413,7 +3552,7 @@
                 <a:ea typeface="Calibri" pitchFamily="34" charset="-122"/>
                 <a:cs typeface="Calibri" pitchFamily="34" charset="-120"/>
               </a:rPr>
-              <a:t>Un trabajo conjunto de varios meses: tres firmantes y las aportaciones técnicas que se citan al final.</a:t>
+              <a:t>Un trabajo conjunto de varios meses, con el reconocimiento colectivo que se recoge al final.</a:t>
             </a:r>
             <a:endParaRPr lang="en-US" sz="1600" dirty="0"/>
           </a:p>
@@ -3472,7 +3611,7 @@
                 <a:ea typeface="Georgia" pitchFamily="34" charset="-122"/>
                 <a:cs typeface="Georgia" pitchFamily="34" charset="-120"/>
               </a:rPr>
-              <a:t>Delfina Lafuente Veira</a:t>
+              <a:t>Dr. José Antonio Ondiviela García</a:t>
             </a:r>
             <a:endParaRPr lang="en-US" sz="1550" dirty="0"/>
           </a:p>
@@ -3511,7 +3650,7 @@
                 <a:ea typeface="Calibri" pitchFamily="34" charset="-122"/>
                 <a:cs typeface="Calibri" pitchFamily="34" charset="-120"/>
               </a:rPr>
-              <a:t>Concejal de Administración Digital, Calidad e Innovación · Ayuntamiento de Pozuelo de Alarcón  ·  pozuelodealarcon.org</a:t>
+              <a:t>Profesor e investigador de la Escuela Politécnica Superior · Universidad Francisco de Vitoria  ·  ufv.es</a:t>
             </a:r>
             <a:endParaRPr lang="en-US" sz="1080" dirty="0"/>
           </a:p>
@@ -3550,7 +3689,7 @@
                 <a:ea typeface="Calibri" pitchFamily="34" charset="-122"/>
                 <a:cs typeface="Calibri" pitchFamily="34" charset="-120"/>
               </a:rPr>
-              <a:t>De ella nace el proyecto y suya es la primera redacción. Y suyo es el mérito menos visible: llevarlo a los servicios de contratación y jurídicos de su propio ayuntamiento y traer sus objeciones de vuelta enteras.</a:t>
+              <a:t>La mirada del mercado: qué se le puede pedir de verdad a un fabricante de software y qué hará que no se presente. Suya es la idea que resuelve el problema de fondo.</a:t>
             </a:r>
             <a:endParaRPr lang="en-US" sz="1140" dirty="0"/>
           </a:p>
@@ -3609,7 +3748,7 @@
                 <a:ea typeface="Georgia" pitchFamily="34" charset="-122"/>
                 <a:cs typeface="Georgia" pitchFamily="34" charset="-120"/>
               </a:rPr>
-              <a:t>Dr. José Antonio Ondiviela García</a:t>
+              <a:t>Miguel Ángel Domínguez Castellano</a:t>
             </a:r>
             <a:endParaRPr lang="en-US" sz="1550" dirty="0"/>
           </a:p>
@@ -3648,7 +3787,7 @@
                 <a:ea typeface="Calibri" pitchFamily="34" charset="-122"/>
                 <a:cs typeface="Calibri" pitchFamily="34" charset="-120"/>
               </a:rPr>
-              <a:t>Profesor e investigador de la Escuela Politécnica Superior · Universidad Francisco de Vitoria  ·  ufv.es</a:t>
+              <a:t>CEO de Add4u · Presidente de Alastria · Presidente del Clúster de Blockchain de la Comunidad de Madrid  ·  miguelangeldominguez.info</a:t>
             </a:r>
             <a:endParaRPr lang="en-US" sz="1080" dirty="0"/>
           </a:p>
@@ -3687,7 +3826,7 @@
                 <a:ea typeface="Calibri" pitchFamily="34" charset="-122"/>
                 <a:cs typeface="Calibri" pitchFamily="34" charset="-120"/>
               </a:rPr>
-              <a:t>La mirada del mercado: qué se le puede pedir de verdad a un fabricante de software y qué hará que no se presente. Suya es la idea que resuelve el problema de fondo.</a:t>
+              <a:t>La perspectiva de quien conoce las dos orillas: la de quien redacta pliegos y la de quien se presenta a ellos. Asume la responsabilidad editorial de la publicación.</a:t>
             </a:r>
             <a:endParaRPr lang="en-US" sz="1140" dirty="0"/>
           </a:p>
@@ -3746,7 +3885,7 @@
                 <a:ea typeface="Georgia" pitchFamily="34" charset="-122"/>
                 <a:cs typeface="Georgia" pitchFamily="34" charset="-120"/>
               </a:rPr>
-              <a:t>Miguel Ángel Domínguez Castellano</a:t>
+              <a:t>Delfina Lafuente Veira — co-impulsora del proyecto</a:t>
             </a:r>
             <a:endParaRPr lang="en-US" sz="1550" dirty="0"/>
           </a:p>
@@ -3785,7 +3924,7 @@
                 <a:ea typeface="Calibri" pitchFamily="34" charset="-122"/>
                 <a:cs typeface="Calibri" pitchFamily="34" charset="-120"/>
               </a:rPr>
-              <a:t>CEO de Add4u · Presidente de Alastria · Presidente del Clúster de Blockchain de la Comunidad de Madrid  ·  miguelangeldominguez.info</a:t>
+              <a:t>Concejal de Administración Digital, Calidad e Innovación · Ayuntamiento de Pozuelo de Alarcón · a título personal  ·  pozuelodealarcon.org</a:t>
             </a:r>
             <a:endParaRPr lang="en-US" sz="1080" dirty="0"/>
           </a:p>
@@ -3824,7 +3963,7 @@
                 <a:ea typeface="Calibri" pitchFamily="34" charset="-122"/>
                 <a:cs typeface="Calibri" pitchFamily="34" charset="-120"/>
               </a:rPr>
-              <a:t>La perspectiva de quien conoce las dos orillas: la de quien redacta pliegos y la de quien se presenta a ellos. Asume la responsabilidad editorial de la publicación.</a:t>
+              <a:t>De ella nace el proyecto y suya es la primera redacción. Y suyo es el mérito menos visible: llevarlo a los servicios de contratación y jurídicos de su propio ayuntamiento y traer sus objeciones de vuelta enteras.</a:t>
             </a:r>
             <a:endParaRPr lang="en-US" sz="1140" dirty="0"/>
           </a:p>
@@ -3832,89 +3971,30 @@
       </p:sp>
       <p:sp>
         <p:nvSpPr>
-          <p:cNvPr id="16" name="Shape 14"/>
-          <p:cNvSpPr/>
-          <p:nvPr/>
-        </p:nvSpPr>
-        <p:spPr>
-          <a:xfrm>
-            <a:off x="822960" y="4873752"/>
-            <a:ext cx="82296" cy="822960"/>
-          </a:xfrm>
-          <a:prstGeom prst="rect">
-            <a:avLst/>
-          </a:prstGeom>
-          <a:solidFill>
-            <a:srgbClr val="1F3864"/>
-          </a:solidFill>
-          <a:ln/>
-        </p:spPr>
-      </p:sp>
-      <p:sp>
-        <p:nvSpPr>
-          <p:cNvPr id="17" name="Text 15"/>
-          <p:cNvSpPr/>
-          <p:nvPr/>
-        </p:nvSpPr>
-        <p:spPr>
-          <a:xfrm>
-            <a:off x="1188720" y="4873752"/>
-            <a:ext cx="10058400" cy="246888"/>
-          </a:xfrm>
-          <a:prstGeom prst="rect">
-            <a:avLst/>
-          </a:prstGeom>
-          <a:noFill/>
-          <a:ln/>
-        </p:spPr>
-        <p:txBody>
-          <a:bodyPr wrap="square" rtlCol="0" anchor="ctr"/>
-          <a:lstStyle/>
-          <a:p>
-            <a:pPr indent="0" marL="0">
-              <a:buNone/>
-            </a:pPr>
-            <a:r>
-              <a:rPr lang="en-US" sz="1550" b="1" dirty="0">
-                <a:solidFill>
-                  <a:srgbClr val="1F3864"/>
-                </a:solidFill>
-                <a:latin typeface="Georgia" pitchFamily="34" charset="0"/>
-                <a:ea typeface="Georgia" pitchFamily="34" charset="-122"/>
-                <a:cs typeface="Georgia" pitchFamily="34" charset="-120"/>
-              </a:rPr>
-              <a:t>Otras aportaciones</a:t>
-            </a:r>
-            <a:endParaRPr lang="en-US" sz="1550" dirty="0"/>
-          </a:p>
-        </p:txBody>
-      </p:sp>
-      <p:sp>
-        <p:nvSpPr>
-          <p:cNvPr id="18" name="Text 16"/>
-          <p:cNvSpPr/>
-          <p:nvPr/>
-        </p:nvSpPr>
-        <p:spPr>
-          <a:xfrm>
-            <a:off x="1188720" y="5120640"/>
-            <a:ext cx="10058400" cy="210312"/>
-          </a:xfrm>
-          <a:prstGeom prst="rect">
-            <a:avLst/>
-          </a:prstGeom>
-          <a:noFill/>
-          <a:ln/>
-        </p:spPr>
-        <p:txBody>
-          <a:bodyPr wrap="square" rtlCol="0" anchor="ctr"/>
-          <a:lstStyle/>
-          <a:p>
-            <a:pPr indent="0" marL="0">
-              <a:buNone/>
-            </a:pPr>
-            <a:r>
-              <a:rPr lang="en-US" sz="1080" dirty="0">
+          <p:cNvPr id="16" name="Text 14"/>
+          <p:cNvSpPr/>
+          <p:nvPr/>
+        </p:nvSpPr>
+        <p:spPr>
+          <a:xfrm>
+            <a:off x="822960" y="5943600"/>
+            <a:ext cx="10515600" cy="548640"/>
+          </a:xfrm>
+          <a:prstGeom prst="rect">
+            <a:avLst/>
+          </a:prstGeom>
+          <a:noFill/>
+          <a:ln/>
+        </p:spPr>
+        <p:txBody>
+          <a:bodyPr wrap="square" rtlCol="0" anchor="ctr"/>
+          <a:lstStyle/>
+          <a:p>
+            <a:pPr indent="0" marL="0">
+              <a:buNone/>
+            </a:pPr>
+            <a:r>
+              <a:rPr lang="en-US" sz="1100" i="1" dirty="0">
                 <a:solidFill>
                   <a:srgbClr val="6E6A63"/>
                 </a:solidFill>
@@ -3922,85 +4002,7 @@
                 <a:ea typeface="Calibri" pitchFamily="34" charset="-122"/>
                 <a:cs typeface="Calibri" pitchFamily="34" charset="-120"/>
               </a:rPr>
-              <a:t>Personal técnico del Ayuntamiento de Pozuelo de Alarcón</a:t>
-            </a:r>
-            <a:endParaRPr lang="en-US" sz="1080" dirty="0"/>
-          </a:p>
-        </p:txBody>
-      </p:sp>
-      <p:sp>
-        <p:nvSpPr>
-          <p:cNvPr id="19" name="Text 17"/>
-          <p:cNvSpPr/>
-          <p:nvPr/>
-        </p:nvSpPr>
-        <p:spPr>
-          <a:xfrm>
-            <a:off x="1188720" y="5330952"/>
-            <a:ext cx="10058400" cy="365760"/>
-          </a:xfrm>
-          <a:prstGeom prst="rect">
-            <a:avLst/>
-          </a:prstGeom>
-          <a:noFill/>
-          <a:ln/>
-        </p:spPr>
-        <p:txBody>
-          <a:bodyPr wrap="square" rtlCol="0" anchor="ctr"/>
-          <a:lstStyle/>
-          <a:p>
-            <a:pPr indent="0" marL="0">
-              <a:buNone/>
-            </a:pPr>
-            <a:r>
-              <a:rPr lang="en-US" sz="1140" dirty="0">
-                <a:solidFill>
-                  <a:srgbClr val="22201D"/>
-                </a:solidFill>
-                <a:latin typeface="Calibri" pitchFamily="34" charset="0"/>
-                <a:ea typeface="Calibri" pitchFamily="34" charset="-122"/>
-                <a:cs typeface="Calibri" pitchFamily="34" charset="-120"/>
-              </a:rPr>
-              <a:t>El contraste de la práctica municipal y la lectura crítica del borrador. Sus nombres se incorporarán en la siguiente versión, con su consentimiento expreso.</a:t>
-            </a:r>
-            <a:endParaRPr lang="en-US" sz="1140" dirty="0"/>
-          </a:p>
-        </p:txBody>
-      </p:sp>
-      <p:sp>
-        <p:nvSpPr>
-          <p:cNvPr id="20" name="Text 18"/>
-          <p:cNvSpPr/>
-          <p:nvPr/>
-        </p:nvSpPr>
-        <p:spPr>
-          <a:xfrm>
-            <a:off x="822960" y="5943600"/>
-            <a:ext cx="10515600" cy="548640"/>
-          </a:xfrm>
-          <a:prstGeom prst="rect">
-            <a:avLst/>
-          </a:prstGeom>
-          <a:noFill/>
-          <a:ln/>
-        </p:spPr>
-        <p:txBody>
-          <a:bodyPr wrap="square" rtlCol="0" anchor="ctr"/>
-          <a:lstStyle/>
-          <a:p>
-            <a:pPr indent="0" marL="0">
-              <a:buNone/>
-            </a:pPr>
-            <a:r>
-              <a:rPr lang="en-US" sz="1100" i="1" dirty="0">
-                <a:solidFill>
-                  <a:srgbClr val="6E6A63"/>
-                </a:solidFill>
-                <a:latin typeface="Calibri" pitchFamily="34" charset="0"/>
-                <a:ea typeface="Calibri" pitchFamily="34" charset="-122"/>
-                <a:cs typeface="Calibri" pitchFamily="34" charset="-120"/>
-              </a:rPr>
-              <a:t>Las cuatro dificultades del §M1.1 son la razón de ser de esta versión y se responden una a una en el cuerpo del documento. Ningún órgano de contratación, intervención o asesoría jurídica se ha pronunciado sobre el catálogo.</a:t>
+              <a:t>El contraste con la práctica real de la contratación y la lectura crítica de los borradores son de los servicios técnicos municipales, y se reconocen de forma colectiva y deliberada. Las cuatro dificultades del §M1.1 son la razón de ser de esta versión y se responden una a una en el cuerpo del documento. Ningún órgano de contratación, intervención o asesoría jurídica se ha pronunciado sobre el catálogo.</a:t>
             </a:r>
             <a:endParaRPr lang="en-US" sz="1100" dirty="0"/>
           </a:p>
@@ -7839,7 +7841,7 @@
                 <a:ea typeface="Calibri" pitchFamily="34" charset="-122"/>
                 <a:cs typeface="Calibri" pitchFamily="34" charset="-120"/>
               </a:rPr>
-              <a:t>El clausulado nació en el Ayuntamiento de Pozuelo de Alarcón en 2026. Su memoria empieza nombrando, sin suavizarlas, las cuatro dificultades que quienes lo han trabajado han observado que suceden en la contratación pública.</a:t>
+              <a:t>El clausulado nació en 2026 de un problema real de gestión dentro de una entidad local. Su memoria empieza nombrando, sin suavizarlas, las cuatro dificultades que quienes lo han trabajado han observado que suceden en la contratación pública.</a:t>
             </a:r>
             <a:endParaRPr lang="en-US" sz="1750" dirty="0"/>
           </a:p>
